--- a/assets/figures-editable/c3-c4/c3-e32.pptx
+++ b/assets/figures-editable/c3-c4/c3-e32.pptx
@@ -3104,8 +3104,8 @@
         </p:nvSpPr>
         <p:spPr>
           <a:xfrm>
-            <a:off x="274320" y="137160"/>
-            <a:ext cx="11612880" cy="365760"/>
+            <a:off x="274320" y="118872"/>
+            <a:ext cx="11612880" cy="340105"/>
           </a:xfrm>
           <a:prstGeom prst="rect">
             <a:avLst/>
@@ -3114,7 +3114,7 @@
           <a:effectLst/>
         </p:spPr>
         <p:txBody>
-          <a:bodyPr wrap="square" lIns="27432" rIns="27432" tIns="18288" bIns="18288" anchor="ctr">
+          <a:bodyPr wrap="none" lIns="18288" rIns="18288" tIns="18288" bIns="18288" anchor="t">
             <a:spAutoFit/>
           </a:bodyPr>
           <a:lstStyle/>
@@ -3125,7 +3125,7 @@
               </a:spcAft>
             </a:pPr>
             <a:r>
-              <a:rPr sz="2100" b="0" i="0">
+              <a:rPr sz="1900" b="1" i="0">
                 <a:solidFill>
                   <a:srgbClr val="8EDBD4"/>
                 </a:solidFill>
@@ -3136,23 +3136,20 @@
           </a:p>
         </p:txBody>
       </p:sp>
-      <p:sp>
-        <p:nvSpPr>
-          <p:cNvPr id="3" name="C3-E32 rect 1" descr="sci-ppt:o001"/>
-          <p:cNvSpPr/>
+      <p:cxnSp>
+        <p:nvCxnSpPr>
+          <p:cNvPr id="3" name="C3-E32 line 1" descr="sci-ppt:o001"/>
+          <p:cNvCxnSpPr/>
           <p:nvPr/>
-        </p:nvSpPr>
-        <p:spPr>
-          <a:xfrm>
-            <a:off x="731520" y="1508760"/>
-            <a:ext cx="4937760" cy="731520"/>
-          </a:xfrm>
-          <a:prstGeom prst="rect">
+        </p:nvCxnSpPr>
+        <p:spPr>
+          <a:xfrm>
+            <a:off x="8686800" y="4526280"/>
+            <a:ext cx="3017520" cy="0"/>
+          </a:xfrm>
+          <a:prstGeom prst="line">
             <a:avLst/>
           </a:prstGeom>
-          <a:solidFill>
-            <a:srgbClr val="213E4B"/>
-          </a:solidFill>
           <a:ln w="19050">
             <a:solidFill>
               <a:srgbClr val="B4C7D2"/>
@@ -3160,78 +3157,51 @@
           </a:ln>
           <a:effectLst/>
         </p:spPr>
-        <p:txBody>
-          <a:bodyPr rtlCol="0" anchor="ctr"/>
-          <a:lstStyle/>
-          <a:p>
-            <a:pPr algn="ctr"/>
-          </a:p>
-        </p:txBody>
-      </p:sp>
+      </p:cxnSp>
       <p:cxnSp>
         <p:nvCxnSpPr>
-          <p:cNvPr id="4" name="C3-E32 arrow 2" descr="sci-ppt:o002"/>
+          <p:cNvPr id="4" name="C3-E32 line 2" descr="sci-ppt:o002"/>
           <p:cNvCxnSpPr/>
           <p:nvPr/>
         </p:nvCxnSpPr>
         <p:spPr>
           <a:xfrm>
-            <a:off x="1005840" y="1874519"/>
-            <a:ext cx="4297680" cy="0"/>
+            <a:off x="8686800" y="1783080"/>
+            <a:ext cx="0" cy="2743200"/>
           </a:xfrm>
           <a:prstGeom prst="line">
             <a:avLst/>
           </a:prstGeom>
-          <a:ln w="25400">
+          <a:ln w="19050">
             <a:solidFill>
-              <a:srgbClr val="8EDBD4"/>
+              <a:srgbClr val="B4C7D2"/>
             </a:solidFill>
-            <a:headEnd type="none" w="med" len="med"/>
-            <a:tailEnd type="triangle" w="med" len="med"/>
           </a:ln>
           <a:effectLst/>
         </p:spPr>
       </p:cxnSp>
-      <p:sp>
-        <p:nvSpPr>
-          <p:cNvPr id="5" name="C3-E32 text 3" descr="sci-ppt:o003"/>
-          <p:cNvSpPr txBox="1"/>
+      <p:cxnSp>
+        <p:nvCxnSpPr>
+          <p:cNvPr id="5" name="C3-E32 line 3" descr="sci-ppt:o003"/>
+          <p:cNvCxnSpPr/>
           <p:nvPr/>
-        </p:nvSpPr>
-        <p:spPr>
-          <a:xfrm>
-            <a:off x="1463040" y="1051560"/>
-            <a:ext cx="3931920" cy="365760"/>
-          </a:xfrm>
-          <a:prstGeom prst="rect">
+        </p:nvCxnSpPr>
+        <p:spPr>
+          <a:xfrm>
+            <a:off x="8686800" y="4526280"/>
+            <a:ext cx="0" cy="64008"/>
+          </a:xfrm>
+          <a:prstGeom prst="line">
             <a:avLst/>
           </a:prstGeom>
-          <a:noFill/>
+          <a:ln w="12700">
+            <a:solidFill>
+              <a:srgbClr val="B4C7D2"/>
+            </a:solidFill>
+          </a:ln>
           <a:effectLst/>
         </p:spPr>
-        <p:txBody>
-          <a:bodyPr wrap="square" lIns="27432" rIns="27432" tIns="18288" bIns="18288" anchor="ctr">
-            <a:spAutoFit/>
-          </a:bodyPr>
-          <a:lstStyle/>
-          <a:p>
-            <a:pPr algn="l">
-              <a:spcAft>
-                <a:spcPts val="0"/>
-              </a:spcAft>
-            </a:pPr>
-            <a:r>
-              <a:rPr sz="1800" b="0" i="0">
-                <a:solidFill>
-                  <a:srgbClr val="E7F0F3"/>
-                </a:solidFill>
-                <a:latin typeface="Arial"/>
-              </a:rPr>
-              <a:t>Finite emitted liquid: m_j, E_j, U_j</a:t>
-            </a:r>
-          </a:p>
-        </p:txBody>
-      </p:sp>
+      </p:cxnSp>
       <p:cxnSp>
         <p:nvCxnSpPr>
           <p:cNvPr id="6" name="C3-E32 line 4" descr="sci-ppt:o004"/>
@@ -3240,15 +3210,15 @@
         </p:nvCxnSpPr>
         <p:spPr>
           <a:xfrm>
-            <a:off x="731520" y="2606040"/>
-            <a:ext cx="4937760" cy="0"/>
+            <a:off x="8686800" y="1783080"/>
+            <a:ext cx="0" cy="2743200"/>
           </a:xfrm>
           <a:prstGeom prst="line">
             <a:avLst/>
           </a:prstGeom>
-          <a:ln w="25400">
+          <a:ln w="7620">
             <a:solidFill>
-              <a:srgbClr val="8EDBD4"/>
+              <a:srgbClr val="2E4756"/>
             </a:solidFill>
           </a:ln>
           <a:effectLst/>
@@ -3262,8 +3232,8 @@
         </p:nvSpPr>
         <p:spPr>
           <a:xfrm>
-            <a:off x="2743200" y="2697480"/>
-            <a:ext cx="1828800" cy="365760"/>
+            <a:off x="8229600" y="4608576"/>
+            <a:ext cx="914400" cy="208407"/>
           </a:xfrm>
           <a:prstGeom prst="rect">
             <a:avLst/>
@@ -3272,24 +3242,24 @@
           <a:effectLst/>
         </p:spPr>
         <p:txBody>
-          <a:bodyPr wrap="square" lIns="27432" rIns="27432" tIns="18288" bIns="18288" anchor="ctr">
+          <a:bodyPr wrap="none" lIns="18288" rIns="18288" tIns="18288" bIns="18288" anchor="t">
             <a:spAutoFit/>
           </a:bodyPr>
           <a:lstStyle/>
           <a:p>
-            <a:pPr algn="l">
+            <a:pPr algn="ctr">
               <a:spcAft>
                 <a:spcPts val="0"/>
               </a:spcAft>
             </a:pPr>
             <a:r>
-              <a:rPr sz="1700" b="0" i="0">
+              <a:rPr sz="1050" b="0" i="0">
                 <a:solidFill>
-                  <a:srgbClr val="E7F0F3"/>
+                  <a:srgbClr val="B4C7D2"/>
                 </a:solidFill>
                 <a:latin typeface="Arial"/>
               </a:rPr>
-              <a:t>L_j</a:t>
+              <a:t>0e+00</a:t>
             </a:r>
           </a:p>
         </p:txBody>
@@ -3302,30 +3272,52 @@
         </p:nvCxnSpPr>
         <p:spPr>
           <a:xfrm>
-            <a:off x="457200" y="1508760"/>
-            <a:ext cx="0" cy="731520"/>
+            <a:off x="10058400" y="4526280"/>
+            <a:ext cx="0" cy="64008"/>
           </a:xfrm>
           <a:prstGeom prst="line">
             <a:avLst/>
           </a:prstGeom>
-          <a:ln w="25400">
+          <a:ln w="12700">
             <a:solidFill>
-              <a:srgbClr val="8EDBD4"/>
+              <a:srgbClr val="B4C7D2"/>
             </a:solidFill>
           </a:ln>
           <a:effectLst/>
         </p:spPr>
       </p:cxnSp>
-      <p:sp>
-        <p:nvSpPr>
-          <p:cNvPr id="9" name="C3-E32 text 7" descr="sci-ppt:o007"/>
+      <p:cxnSp>
+        <p:nvCxnSpPr>
+          <p:cNvPr id="9" name="C3-E32 line 7" descr="sci-ppt:o007"/>
+          <p:cNvCxnSpPr/>
+          <p:nvPr/>
+        </p:nvCxnSpPr>
+        <p:spPr>
+          <a:xfrm>
+            <a:off x="10058400" y="1783080"/>
+            <a:ext cx="0" cy="2743200"/>
+          </a:xfrm>
+          <a:prstGeom prst="line">
+            <a:avLst/>
+          </a:prstGeom>
+          <a:ln w="7620">
+            <a:solidFill>
+              <a:srgbClr val="2E4756"/>
+            </a:solidFill>
+          </a:ln>
+          <a:effectLst/>
+        </p:spPr>
+      </p:cxnSp>
+      <p:sp>
+        <p:nvSpPr>
+          <p:cNvPr id="10" name="C3-E32 text 8" descr="sci-ppt:o008"/>
           <p:cNvSpPr txBox="1"/>
           <p:nvPr/>
         </p:nvSpPr>
         <p:spPr>
           <a:xfrm>
-            <a:off x="137160" y="2377440"/>
-            <a:ext cx="1645920" cy="320040"/>
+            <a:off x="9601200" y="4608576"/>
+            <a:ext cx="914400" cy="208407"/>
           </a:xfrm>
           <a:prstGeom prst="rect">
             <a:avLst/>
@@ -3334,94 +3326,82 @@
           <a:effectLst/>
         </p:spPr>
         <p:txBody>
-          <a:bodyPr wrap="square" lIns="27432" rIns="27432" tIns="18288" bIns="18288" anchor="ctr">
+          <a:bodyPr wrap="none" lIns="18288" rIns="18288" tIns="18288" bIns="18288" anchor="t">
             <a:spAutoFit/>
           </a:bodyPr>
           <a:lstStyle/>
           <a:p>
-            <a:pPr algn="l">
+            <a:pPr algn="ctr">
               <a:spcAft>
                 <a:spcPts val="0"/>
               </a:spcAft>
             </a:pPr>
             <a:r>
-              <a:rPr sz="1400" b="0" i="0">
+              <a:rPr sz="1050" b="0" i="0">
                 <a:solidFill>
-                  <a:srgbClr val="E7F0F3"/>
+                  <a:srgbClr val="B4C7D2"/>
                 </a:solidFill>
                 <a:latin typeface="Arial"/>
               </a:rPr>
-              <a:t>d_j = 2a_j</a:t>
+              <a:t>1e-10</a:t>
             </a:r>
           </a:p>
         </p:txBody>
       </p:sp>
       <p:cxnSp>
         <p:nvCxnSpPr>
-          <p:cNvPr id="10" name="C3-E32 arrow 8" descr="sci-ppt:o008"/>
+          <p:cNvPr id="11" name="C3-E32 line 9" descr="sci-ppt:o009"/>
           <p:cNvCxnSpPr/>
           <p:nvPr/>
         </p:nvCxnSpPr>
         <p:spPr>
           <a:xfrm>
-            <a:off x="5760720" y="1874519"/>
-            <a:ext cx="4754880" cy="0"/>
+            <a:off x="11430000" y="4526280"/>
+            <a:ext cx="0" cy="64008"/>
           </a:xfrm>
           <a:prstGeom prst="line">
             <a:avLst/>
           </a:prstGeom>
-          <a:ln w="25400">
-            <a:solidFill>
-              <a:srgbClr val="8EDBD4"/>
-            </a:solidFill>
-            <a:headEnd type="none" w="med" len="med"/>
-            <a:tailEnd type="triangle" w="med" len="med"/>
-          </a:ln>
-          <a:effectLst/>
-        </p:spPr>
-      </p:cxnSp>
-      <p:sp>
-        <p:nvSpPr>
-          <p:cNvPr id="11" name="C3-E32 rect 9" descr="sci-ppt:o009"/>
-          <p:cNvSpPr/>
-          <p:nvPr/>
-        </p:nvSpPr>
-        <p:spPr>
-          <a:xfrm>
-            <a:off x="10607040" y="1051560"/>
-            <a:ext cx="182880" cy="2194560"/>
-          </a:xfrm>
-          <a:prstGeom prst="rect">
-            <a:avLst/>
-          </a:prstGeom>
-          <a:solidFill>
-            <a:srgbClr val="213E4B"/>
-          </a:solidFill>
-          <a:ln w="19050">
+          <a:ln w="12700">
             <a:solidFill>
               <a:srgbClr val="B4C7D2"/>
             </a:solidFill>
           </a:ln>
           <a:effectLst/>
         </p:spPr>
-        <p:txBody>
-          <a:bodyPr rtlCol="0" anchor="ctr"/>
-          <a:lstStyle/>
-          <a:p>
-            <a:pPr algn="ctr"/>
-          </a:p>
-        </p:txBody>
-      </p:sp>
-      <p:sp>
-        <p:nvSpPr>
-          <p:cNvPr id="12" name="C3-E32 text 10" descr="sci-ppt:o010"/>
+      </p:cxnSp>
+      <p:cxnSp>
+        <p:nvCxnSpPr>
+          <p:cNvPr id="12" name="C3-E32 line 10" descr="sci-ppt:o010"/>
+          <p:cNvCxnSpPr/>
+          <p:nvPr/>
+        </p:nvCxnSpPr>
+        <p:spPr>
+          <a:xfrm>
+            <a:off x="11430000" y="1783080"/>
+            <a:ext cx="0" cy="2743200"/>
+          </a:xfrm>
+          <a:prstGeom prst="line">
+            <a:avLst/>
+          </a:prstGeom>
+          <a:ln w="7620">
+            <a:solidFill>
+              <a:srgbClr val="2E4756"/>
+            </a:solidFill>
+          </a:ln>
+          <a:effectLst/>
+        </p:spPr>
+      </p:cxnSp>
+      <p:sp>
+        <p:nvSpPr>
+          <p:cNvPr id="13" name="C3-E32 text 11" descr="sci-ppt:o011"/>
           <p:cNvSpPr txBox="1"/>
           <p:nvPr/>
         </p:nvSpPr>
         <p:spPr>
           <a:xfrm>
-            <a:off x="7315200" y="2286000"/>
-            <a:ext cx="1828800" cy="365760"/>
+            <a:off x="10972800" y="4608576"/>
+            <a:ext cx="914400" cy="208407"/>
           </a:xfrm>
           <a:prstGeom prst="rect">
             <a:avLst/>
@@ -3430,50 +3410,28 @@
           <a:effectLst/>
         </p:spPr>
         <p:txBody>
-          <a:bodyPr wrap="square" lIns="27432" rIns="27432" tIns="18288" bIns="18288" anchor="ctr">
+          <a:bodyPr wrap="none" lIns="18288" rIns="18288" tIns="18288" bIns="18288" anchor="t">
             <a:spAutoFit/>
           </a:bodyPr>
           <a:lstStyle/>
           <a:p>
-            <a:pPr algn="l">
+            <a:pPr algn="ctr">
               <a:spcAft>
                 <a:spcPts val="0"/>
               </a:spcAft>
             </a:pPr>
             <a:r>
-              <a:rPr sz="1700" b="0" i="0">
+              <a:rPr sz="1050" b="0" i="0">
                 <a:solidFill>
-                  <a:srgbClr val="E7F0F3"/>
+                  <a:srgbClr val="B4C7D2"/>
                 </a:solidFill>
                 <a:latin typeface="Arial"/>
               </a:rPr>
-              <a:t>Gap H</a:t>
-            </a:r>
-          </a:p>
-        </p:txBody>
-      </p:sp>
-      <p:cxnSp>
-        <p:nvCxnSpPr>
-          <p:cNvPr id="13" name="C3-E32 line 11" descr="sci-ppt:o011"/>
-          <p:cNvCxnSpPr/>
-          <p:nvPr/>
-        </p:nvCxnSpPr>
-        <p:spPr>
-          <a:xfrm>
-            <a:off x="5943600" y="1417319"/>
-            <a:ext cx="59436" cy="376"/>
-          </a:xfrm>
-          <a:prstGeom prst="line">
-            <a:avLst/>
-          </a:prstGeom>
-          <a:ln w="25400">
-            <a:solidFill>
-              <a:srgbClr val="8EDBD4"/>
-            </a:solidFill>
-          </a:ln>
-          <a:effectLst/>
-        </p:spPr>
-      </p:cxnSp>
+              <a:t>2e-10</a:t>
+            </a:r>
+          </a:p>
+        </p:txBody>
+      </p:sp>
       <p:cxnSp>
         <p:nvCxnSpPr>
           <p:cNvPr id="14" name="C3-E32 line 12" descr="sci-ppt:o012"/>
@@ -3482,15 +3440,15 @@
         </p:nvCxnSpPr>
         <p:spPr>
           <a:xfrm>
-            <a:off x="6003036" y="1417695"/>
-            <a:ext cx="59436" cy="7407"/>
+            <a:off x="8622792" y="4526280"/>
+            <a:ext cx="64008" cy="0"/>
           </a:xfrm>
           <a:prstGeom prst="line">
             <a:avLst/>
           </a:prstGeom>
-          <a:ln w="25400">
+          <a:ln w="12700">
             <a:solidFill>
-              <a:srgbClr val="8EDBD4"/>
+              <a:srgbClr val="B4C7D2"/>
             </a:solidFill>
           </a:ln>
           <a:effectLst/>
@@ -3504,15 +3462,15 @@
         </p:nvCxnSpPr>
         <p:spPr>
           <a:xfrm>
-            <a:off x="6062472" y="1425102"/>
-            <a:ext cx="59436" cy="14305"/>
+            <a:off x="8622792" y="3611880"/>
+            <a:ext cx="64008" cy="0"/>
           </a:xfrm>
           <a:prstGeom prst="line">
             <a:avLst/>
           </a:prstGeom>
-          <a:ln w="25400">
+          <a:ln w="12700">
             <a:solidFill>
-              <a:srgbClr val="8EDBD4"/>
+              <a:srgbClr val="B4C7D2"/>
             </a:solidFill>
           </a:ln>
           <a:effectLst/>
@@ -3526,42 +3484,60 @@
         </p:nvCxnSpPr>
         <p:spPr>
           <a:xfrm>
-            <a:off x="6121908" y="1439407"/>
-            <a:ext cx="59436" cy="20508"/>
+            <a:off x="8686800" y="3611880"/>
+            <a:ext cx="3017520" cy="0"/>
           </a:xfrm>
           <a:prstGeom prst="line">
             <a:avLst/>
           </a:prstGeom>
-          <a:ln w="25400">
+          <a:ln w="7620">
             <a:solidFill>
-              <a:srgbClr val="8EDBD4"/>
+              <a:srgbClr val="2E4756"/>
             </a:solidFill>
           </a:ln>
           <a:effectLst/>
         </p:spPr>
       </p:cxnSp>
-      <p:cxnSp>
-        <p:nvCxnSpPr>
-          <p:cNvPr id="17" name="C3-E32 line 15" descr="sci-ppt:o015"/>
-          <p:cNvCxnSpPr/>
+      <p:sp>
+        <p:nvSpPr>
+          <p:cNvPr id="17" name="C3-E32 text 15" descr="sci-ppt:o015"/>
+          <p:cNvSpPr txBox="1"/>
           <p:nvPr/>
-        </p:nvCxnSpPr>
-        <p:spPr>
-          <a:xfrm>
-            <a:off x="6181344" y="1459915"/>
-            <a:ext cx="59436" cy="25481"/>
-          </a:xfrm>
-          <a:prstGeom prst="line">
+        </p:nvSpPr>
+        <p:spPr>
+          <a:xfrm>
+            <a:off x="7818120" y="3529584"/>
+            <a:ext cx="777240" cy="208407"/>
+          </a:xfrm>
+          <a:prstGeom prst="rect">
             <a:avLst/>
           </a:prstGeom>
-          <a:ln w="25400">
-            <a:solidFill>
-              <a:srgbClr val="8EDBD4"/>
-            </a:solidFill>
-          </a:ln>
+          <a:noFill/>
           <a:effectLst/>
         </p:spPr>
-      </p:cxnSp>
+        <p:txBody>
+          <a:bodyPr wrap="none" lIns="18288" rIns="18288" tIns="18288" bIns="18288" anchor="t">
+            <a:spAutoFit/>
+          </a:bodyPr>
+          <a:lstStyle/>
+          <a:p>
+            <a:pPr algn="r">
+              <a:spcAft>
+                <a:spcPts val="0"/>
+              </a:spcAft>
+            </a:pPr>
+            <a:r>
+              <a:rPr sz="1050" b="0" i="0">
+                <a:solidFill>
+                  <a:srgbClr val="B4C7D2"/>
+                </a:solidFill>
+                <a:latin typeface="Arial"/>
+              </a:rPr>
+              <a:t>2</a:t>
+            </a:r>
+          </a:p>
+        </p:txBody>
+      </p:sp>
       <p:cxnSp>
         <p:nvCxnSpPr>
           <p:cNvPr id="18" name="C3-E32 line 16" descr="sci-ppt:o016"/>
@@ -3570,15 +3546,15 @@
         </p:nvCxnSpPr>
         <p:spPr>
           <a:xfrm>
-            <a:off x="6240780" y="1485396"/>
-            <a:ext cx="59436" cy="28760"/>
+            <a:off x="8622792" y="2697480"/>
+            <a:ext cx="64008" cy="0"/>
           </a:xfrm>
           <a:prstGeom prst="line">
             <a:avLst/>
           </a:prstGeom>
-          <a:ln w="25400">
+          <a:ln w="12700">
             <a:solidFill>
-              <a:srgbClr val="8EDBD4"/>
+              <a:srgbClr val="B4C7D2"/>
             </a:solidFill>
           </a:ln>
           <a:effectLst/>
@@ -3592,42 +3568,60 @@
         </p:nvCxnSpPr>
         <p:spPr>
           <a:xfrm>
-            <a:off x="6300216" y="1514156"/>
-            <a:ext cx="59436" cy="29994"/>
+            <a:off x="8686800" y="2697480"/>
+            <a:ext cx="3017520" cy="0"/>
           </a:xfrm>
           <a:prstGeom prst="line">
             <a:avLst/>
           </a:prstGeom>
-          <a:ln w="25400">
+          <a:ln w="7620">
             <a:solidFill>
-              <a:srgbClr val="8EDBD4"/>
+              <a:srgbClr val="2E4756"/>
             </a:solidFill>
           </a:ln>
           <a:effectLst/>
         </p:spPr>
       </p:cxnSp>
-      <p:cxnSp>
-        <p:nvCxnSpPr>
-          <p:cNvPr id="20" name="C3-E32 line 18" descr="sci-ppt:o018"/>
-          <p:cNvCxnSpPr/>
+      <p:sp>
+        <p:nvSpPr>
+          <p:cNvPr id="20" name="C3-E32 text 18" descr="sci-ppt:o018"/>
+          <p:cNvSpPr txBox="1"/>
           <p:nvPr/>
-        </p:nvCxnSpPr>
-        <p:spPr>
-          <a:xfrm>
-            <a:off x="6359652" y="1544150"/>
-            <a:ext cx="59436" cy="28973"/>
-          </a:xfrm>
-          <a:prstGeom prst="line">
+        </p:nvSpPr>
+        <p:spPr>
+          <a:xfrm>
+            <a:off x="7818120" y="2615184"/>
+            <a:ext cx="777240" cy="208407"/>
+          </a:xfrm>
+          <a:prstGeom prst="rect">
             <a:avLst/>
           </a:prstGeom>
-          <a:ln w="25400">
-            <a:solidFill>
-              <a:srgbClr val="8EDBD4"/>
-            </a:solidFill>
-          </a:ln>
+          <a:noFill/>
           <a:effectLst/>
         </p:spPr>
-      </p:cxnSp>
+        <p:txBody>
+          <a:bodyPr wrap="none" lIns="18288" rIns="18288" tIns="18288" bIns="18288" anchor="t">
+            <a:spAutoFit/>
+          </a:bodyPr>
+          <a:lstStyle/>
+          <a:p>
+            <a:pPr algn="r">
+              <a:spcAft>
+                <a:spcPts val="0"/>
+              </a:spcAft>
+            </a:pPr>
+            <a:r>
+              <a:rPr sz="1050" b="0" i="0">
+                <a:solidFill>
+                  <a:srgbClr val="B4C7D2"/>
+                </a:solidFill>
+                <a:latin typeface="Arial"/>
+              </a:rPr>
+              <a:t>4</a:t>
+            </a:r>
+          </a:p>
+        </p:txBody>
+      </p:sp>
       <p:cxnSp>
         <p:nvCxnSpPr>
           <p:cNvPr id="21" name="C3-E32 line 19" descr="sci-ppt:o019"/>
@@ -3636,15 +3630,15 @@
         </p:nvCxnSpPr>
         <p:spPr>
           <a:xfrm>
-            <a:off x="6419088" y="1573123"/>
-            <a:ext cx="59436" cy="25661"/>
+            <a:off x="8622792" y="1783080"/>
+            <a:ext cx="64008" cy="0"/>
           </a:xfrm>
           <a:prstGeom prst="line">
             <a:avLst/>
           </a:prstGeom>
-          <a:ln w="25400">
+          <a:ln w="12700">
             <a:solidFill>
-              <a:srgbClr val="8EDBD4"/>
+              <a:srgbClr val="B4C7D2"/>
             </a:solidFill>
           </a:ln>
           <a:effectLst/>
@@ -3658,1328 +3652,1199 @@
         </p:nvCxnSpPr>
         <p:spPr>
           <a:xfrm>
-            <a:off x="6478524" y="1598784"/>
-            <a:ext cx="59436" cy="20200"/>
+            <a:off x="8686800" y="1783080"/>
+            <a:ext cx="3017520" cy="0"/>
           </a:xfrm>
           <a:prstGeom prst="line">
             <a:avLst/>
           </a:prstGeom>
-          <a:ln w="25400">
+          <a:ln w="7620">
+            <a:solidFill>
+              <a:srgbClr val="2E4756"/>
+            </a:solidFill>
+          </a:ln>
+          <a:effectLst/>
+        </p:spPr>
+      </p:cxnSp>
+      <p:sp>
+        <p:nvSpPr>
+          <p:cNvPr id="23" name="C3-E32 text 21" descr="sci-ppt:o021"/>
+          <p:cNvSpPr txBox="1"/>
+          <p:nvPr/>
+        </p:nvSpPr>
+        <p:spPr>
+          <a:xfrm>
+            <a:off x="7818120" y="1700784"/>
+            <a:ext cx="777240" cy="208407"/>
+          </a:xfrm>
+          <a:prstGeom prst="rect">
+            <a:avLst/>
+          </a:prstGeom>
+          <a:noFill/>
+          <a:effectLst/>
+        </p:spPr>
+        <p:txBody>
+          <a:bodyPr wrap="none" lIns="18288" rIns="18288" tIns="18288" bIns="18288" anchor="t">
+            <a:spAutoFit/>
+          </a:bodyPr>
+          <a:lstStyle/>
+          <a:p>
+            <a:pPr algn="r">
+              <a:spcAft>
+                <a:spcPts val="0"/>
+              </a:spcAft>
+            </a:pPr>
+            <a:r>
+              <a:rPr sz="1050" b="0" i="0">
+                <a:solidFill>
+                  <a:srgbClr val="B4C7D2"/>
+                </a:solidFill>
+                <a:latin typeface="Arial"/>
+              </a:rPr>
+              <a:t>6</a:t>
+            </a:r>
+          </a:p>
+        </p:txBody>
+      </p:sp>
+      <p:sp>
+        <p:nvSpPr>
+          <p:cNvPr id="24" name="C3-E32 text 22" descr="sci-ppt:o022"/>
+          <p:cNvSpPr txBox="1"/>
+          <p:nvPr/>
+        </p:nvSpPr>
+        <p:spPr>
+          <a:xfrm>
+            <a:off x="8686800" y="4809744"/>
+            <a:ext cx="3017520" cy="231648"/>
+          </a:xfrm>
+          <a:prstGeom prst="rect">
+            <a:avLst/>
+          </a:prstGeom>
+          <a:noFill/>
+          <a:effectLst/>
+        </p:spPr>
+        <p:txBody>
+          <a:bodyPr wrap="none" lIns="18288" rIns="18288" tIns="18288" bIns="18288" anchor="t">
+            <a:spAutoFit/>
+          </a:bodyPr>
+          <a:lstStyle/>
+          <a:p>
+            <a:pPr algn="ctr">
+              <a:spcAft>
+                <a:spcPts val="0"/>
+              </a:spcAft>
+            </a:pPr>
+            <a:r>
+              <a:rPr sz="1200" b="0" i="0">
+                <a:solidFill>
+                  <a:srgbClr val="E7F0F3"/>
+                </a:solidFill>
+                <a:latin typeface="Arial"/>
+              </a:rPr>
+              <a:t>Pⱼ  (N s)</a:t>
+            </a:r>
+          </a:p>
+        </p:txBody>
+      </p:sp>
+      <p:sp>
+        <p:nvSpPr>
+          <p:cNvPr id="25" name="C3-E32 text 23" descr="sci-ppt:o023"/>
+          <p:cNvSpPr txBox="1"/>
+          <p:nvPr/>
+        </p:nvSpPr>
+        <p:spPr>
+          <a:xfrm>
+            <a:off x="8138160" y="1435607"/>
+            <a:ext cx="3017520" cy="231648"/>
+          </a:xfrm>
+          <a:prstGeom prst="rect">
+            <a:avLst/>
+          </a:prstGeom>
+          <a:noFill/>
+          <a:effectLst/>
+        </p:spPr>
+        <p:txBody>
+          <a:bodyPr wrap="none" lIns="18288" rIns="18288" tIns="18288" bIns="18288" anchor="t">
+            <a:spAutoFit/>
+          </a:bodyPr>
+          <a:lstStyle/>
+          <a:p>
+            <a:pPr algn="l">
+              <a:spcAft>
+                <a:spcPts val="0"/>
+              </a:spcAft>
+            </a:pPr>
+            <a:r>
+              <a:rPr sz="1200" b="0" i="0">
+                <a:solidFill>
+                  <a:srgbClr val="E7F0F3"/>
+                </a:solidFill>
+                <a:latin typeface="Arial"/>
+              </a:rPr>
+              <a:t>Eⱼ  (nJ)</a:t>
+            </a:r>
+          </a:p>
+        </p:txBody>
+      </p:sp>
+      <p:sp>
+        <p:nvSpPr>
+          <p:cNvPr id="26" name="C3-E32 polygon 24" descr="sci-ppt:o024"/>
+          <p:cNvSpPr/>
+          <p:nvPr/>
+        </p:nvSpPr>
+        <p:spPr>
+          <a:xfrm>
+            <a:off x="8686800" y="1821482"/>
+            <a:ext cx="2956560" cy="2704798"/>
+          </a:xfrm>
+          <a:custGeom>
+            <a:avLst/>
+            <a:gdLst/>
+            <a:ahLst/>
+            <a:cxnLst/>
+            <a:rect l="l" t="t" r="r" b="b"/>
+            <a:pathLst>
+              <a:path w="2956560" h="2704798">
+                <a:moveTo>
+                  <a:pt x="0" y="2704798"/>
+                </a:moveTo>
+                <a:lnTo>
+                  <a:pt x="30480" y="2704510"/>
+                </a:lnTo>
+                <a:lnTo>
+                  <a:pt x="60960" y="2703648"/>
+                </a:lnTo>
+                <a:lnTo>
+                  <a:pt x="91440" y="2702210"/>
+                </a:lnTo>
+                <a:lnTo>
+                  <a:pt x="121920" y="2700198"/>
+                </a:lnTo>
+                <a:lnTo>
+                  <a:pt x="152400" y="2697611"/>
+                </a:lnTo>
+                <a:lnTo>
+                  <a:pt x="182880" y="2694449"/>
+                </a:lnTo>
+                <a:lnTo>
+                  <a:pt x="213360" y="2690712"/>
+                </a:lnTo>
+                <a:lnTo>
+                  <a:pt x="243840" y="2686399"/>
+                </a:lnTo>
+                <a:lnTo>
+                  <a:pt x="274320" y="2681512"/>
+                </a:lnTo>
+                <a:lnTo>
+                  <a:pt x="304800" y="2676051"/>
+                </a:lnTo>
+                <a:lnTo>
+                  <a:pt x="335280" y="2670014"/>
+                </a:lnTo>
+                <a:lnTo>
+                  <a:pt x="365760" y="2663402"/>
+                </a:lnTo>
+                <a:lnTo>
+                  <a:pt x="396240" y="2656215"/>
+                </a:lnTo>
+                <a:lnTo>
+                  <a:pt x="426720" y="2648454"/>
+                </a:lnTo>
+                <a:lnTo>
+                  <a:pt x="457200" y="2640117"/>
+                </a:lnTo>
+                <a:lnTo>
+                  <a:pt x="487680" y="2631205"/>
+                </a:lnTo>
+                <a:lnTo>
+                  <a:pt x="518160" y="2621719"/>
+                </a:lnTo>
+                <a:lnTo>
+                  <a:pt x="548640" y="2611657"/>
+                </a:lnTo>
+                <a:lnTo>
+                  <a:pt x="579120" y="2601021"/>
+                </a:lnTo>
+                <a:lnTo>
+                  <a:pt x="609600" y="2589810"/>
+                </a:lnTo>
+                <a:lnTo>
+                  <a:pt x="640080" y="2578024"/>
+                </a:lnTo>
+                <a:lnTo>
+                  <a:pt x="670560" y="2565662"/>
+                </a:lnTo>
+                <a:lnTo>
+                  <a:pt x="701040" y="2552726"/>
+                </a:lnTo>
+                <a:lnTo>
+                  <a:pt x="731520" y="2539215"/>
+                </a:lnTo>
+                <a:lnTo>
+                  <a:pt x="762000" y="2525129"/>
+                </a:lnTo>
+                <a:lnTo>
+                  <a:pt x="792480" y="2510468"/>
+                </a:lnTo>
+                <a:lnTo>
+                  <a:pt x="822960" y="2495232"/>
+                </a:lnTo>
+                <a:lnTo>
+                  <a:pt x="853440" y="2479422"/>
+                </a:lnTo>
+                <a:lnTo>
+                  <a:pt x="883920" y="2463036"/>
+                </a:lnTo>
+                <a:lnTo>
+                  <a:pt x="914400" y="2446075"/>
+                </a:lnTo>
+                <a:lnTo>
+                  <a:pt x="944880" y="2428540"/>
+                </a:lnTo>
+                <a:lnTo>
+                  <a:pt x="975360" y="2410429"/>
+                </a:lnTo>
+                <a:lnTo>
+                  <a:pt x="1005840" y="2391744"/>
+                </a:lnTo>
+                <a:lnTo>
+                  <a:pt x="1036320" y="2372483"/>
+                </a:lnTo>
+                <a:lnTo>
+                  <a:pt x="1066800" y="2352648"/>
+                </a:lnTo>
+                <a:lnTo>
+                  <a:pt x="1097280" y="2332237"/>
+                </a:lnTo>
+                <a:lnTo>
+                  <a:pt x="1127760" y="2311252"/>
+                </a:lnTo>
+                <a:lnTo>
+                  <a:pt x="1158240" y="2289692"/>
+                </a:lnTo>
+                <a:lnTo>
+                  <a:pt x="1188719" y="2267557"/>
+                </a:lnTo>
+                <a:lnTo>
+                  <a:pt x="1219199" y="2244847"/>
+                </a:lnTo>
+                <a:lnTo>
+                  <a:pt x="1249680" y="2221562"/>
+                </a:lnTo>
+                <a:lnTo>
+                  <a:pt x="1280160" y="2197702"/>
+                </a:lnTo>
+                <a:lnTo>
+                  <a:pt x="1310640" y="2173267"/>
+                </a:lnTo>
+                <a:lnTo>
+                  <a:pt x="1341120" y="2148257"/>
+                </a:lnTo>
+                <a:lnTo>
+                  <a:pt x="1371600" y="2122672"/>
+                </a:lnTo>
+                <a:lnTo>
+                  <a:pt x="1402080" y="2096513"/>
+                </a:lnTo>
+                <a:lnTo>
+                  <a:pt x="1432560" y="2069778"/>
+                </a:lnTo>
+                <a:lnTo>
+                  <a:pt x="1463040" y="2042469"/>
+                </a:lnTo>
+                <a:lnTo>
+                  <a:pt x="1493520" y="2014584"/>
+                </a:lnTo>
+                <a:lnTo>
+                  <a:pt x="1524000" y="1986125"/>
+                </a:lnTo>
+                <a:lnTo>
+                  <a:pt x="1554480" y="1957090"/>
+                </a:lnTo>
+                <a:lnTo>
+                  <a:pt x="1584960" y="1927481"/>
+                </a:lnTo>
+                <a:lnTo>
+                  <a:pt x="1615440" y="1897297"/>
+                </a:lnTo>
+                <a:lnTo>
+                  <a:pt x="1645919" y="1866537"/>
+                </a:lnTo>
+                <a:lnTo>
+                  <a:pt x="1676399" y="1835203"/>
+                </a:lnTo>
+                <a:lnTo>
+                  <a:pt x="1706879" y="1803294"/>
+                </a:lnTo>
+                <a:lnTo>
+                  <a:pt x="1737360" y="1770810"/>
+                </a:lnTo>
+                <a:lnTo>
+                  <a:pt x="1767840" y="1737751"/>
+                </a:lnTo>
+                <a:lnTo>
+                  <a:pt x="1798320" y="1704117"/>
+                </a:lnTo>
+                <a:lnTo>
+                  <a:pt x="1828800" y="1669908"/>
+                </a:lnTo>
+                <a:lnTo>
+                  <a:pt x="1859280" y="1635125"/>
+                </a:lnTo>
+                <a:lnTo>
+                  <a:pt x="1889760" y="1599766"/>
+                </a:lnTo>
+                <a:lnTo>
+                  <a:pt x="1920240" y="1563832"/>
+                </a:lnTo>
+                <a:lnTo>
+                  <a:pt x="1950720" y="1527324"/>
+                </a:lnTo>
+                <a:lnTo>
+                  <a:pt x="1981200" y="1490240"/>
+                </a:lnTo>
+                <a:lnTo>
+                  <a:pt x="2011680" y="1452582"/>
+                </a:lnTo>
+                <a:lnTo>
+                  <a:pt x="2042160" y="1414348"/>
+                </a:lnTo>
+                <a:lnTo>
+                  <a:pt x="2072640" y="1375540"/>
+                </a:lnTo>
+                <a:lnTo>
+                  <a:pt x="2103120" y="1336157"/>
+                </a:lnTo>
+                <a:lnTo>
+                  <a:pt x="2133599" y="1296199"/>
+                </a:lnTo>
+                <a:lnTo>
+                  <a:pt x="2164080" y="1255665"/>
+                </a:lnTo>
+                <a:lnTo>
+                  <a:pt x="2194560" y="1214557"/>
+                </a:lnTo>
+                <a:lnTo>
+                  <a:pt x="2225040" y="1172874"/>
+                </a:lnTo>
+                <a:lnTo>
+                  <a:pt x="2255520" y="1130616"/>
+                </a:lnTo>
+                <a:lnTo>
+                  <a:pt x="2286000" y="1087783"/>
+                </a:lnTo>
+                <a:lnTo>
+                  <a:pt x="2316480" y="1044376"/>
+                </a:lnTo>
+                <a:lnTo>
+                  <a:pt x="2346960" y="1000393"/>
+                </a:lnTo>
+                <a:lnTo>
+                  <a:pt x="2377440" y="955835"/>
+                </a:lnTo>
+                <a:lnTo>
+                  <a:pt x="2407920" y="910702"/>
+                </a:lnTo>
+                <a:lnTo>
+                  <a:pt x="2438400" y="864995"/>
+                </a:lnTo>
+                <a:lnTo>
+                  <a:pt x="2468880" y="818712"/>
+                </a:lnTo>
+                <a:lnTo>
+                  <a:pt x="2499360" y="771855"/>
+                </a:lnTo>
+                <a:lnTo>
+                  <a:pt x="2529840" y="724422"/>
+                </a:lnTo>
+                <a:lnTo>
+                  <a:pt x="2560319" y="676415"/>
+                </a:lnTo>
+                <a:lnTo>
+                  <a:pt x="2590799" y="627833"/>
+                </a:lnTo>
+                <a:lnTo>
+                  <a:pt x="2621280" y="578675"/>
+                </a:lnTo>
+                <a:lnTo>
+                  <a:pt x="2651760" y="528943"/>
+                </a:lnTo>
+                <a:lnTo>
+                  <a:pt x="2682240" y="478636"/>
+                </a:lnTo>
+                <a:lnTo>
+                  <a:pt x="2712720" y="427754"/>
+                </a:lnTo>
+                <a:lnTo>
+                  <a:pt x="2743200" y="376297"/>
+                </a:lnTo>
+                <a:lnTo>
+                  <a:pt x="2773680" y="324265"/>
+                </a:lnTo>
+                <a:lnTo>
+                  <a:pt x="2804160" y="271658"/>
+                </a:lnTo>
+                <a:lnTo>
+                  <a:pt x="2834640" y="218477"/>
+                </a:lnTo>
+                <a:lnTo>
+                  <a:pt x="2865120" y="164720"/>
+                </a:lnTo>
+                <a:lnTo>
+                  <a:pt x="2895600" y="110388"/>
+                </a:lnTo>
+                <a:lnTo>
+                  <a:pt x="2926080" y="55482"/>
+                </a:lnTo>
+                <a:lnTo>
+                  <a:pt x="2956560" y="0"/>
+                </a:lnTo>
+              </a:path>
+            </a:pathLst>
+          </a:custGeom>
+          <a:noFill/>
+          <a:ln w="38100">
             <a:solidFill>
               <a:srgbClr val="8EDBD4"/>
             </a:solidFill>
           </a:ln>
           <a:effectLst/>
         </p:spPr>
-      </p:cxnSp>
-      <p:cxnSp>
-        <p:nvCxnSpPr>
-          <p:cNvPr id="23" name="C3-E32 line 21" descr="sci-ppt:o021"/>
-          <p:cNvCxnSpPr/>
+        <p:txBody>
+          <a:bodyPr rtlCol="0" anchor="ctr"/>
+          <a:lstStyle/>
+          <a:p>
+            <a:pPr algn="ctr"/>
+          </a:p>
+        </p:txBody>
+      </p:sp>
+      <p:sp>
+        <p:nvSpPr>
+          <p:cNvPr id="27" name="C3-E32 polygon 25" descr="sci-ppt:o025"/>
+          <p:cNvSpPr/>
           <p:nvPr/>
-        </p:nvCxnSpPr>
-        <p:spPr>
-          <a:xfrm>
-            <a:off x="6537960" y="1618984"/>
-            <a:ext cx="59436" cy="12908"/>
-          </a:xfrm>
-          <a:prstGeom prst="line">
+        </p:nvSpPr>
+        <p:spPr>
+          <a:xfrm>
+            <a:off x="8686800" y="1783080"/>
+            <a:ext cx="3017520" cy="2743200"/>
+          </a:xfrm>
+          <a:custGeom>
+            <a:avLst/>
+            <a:gdLst/>
+            <a:ahLst/>
+            <a:cxnLst/>
+            <a:rect l="l" t="t" r="r" b="b"/>
+            <a:pathLst>
+              <a:path w="3017520" h="2743200">
+                <a:moveTo>
+                  <a:pt x="0" y="0"/>
+                </a:moveTo>
+                <a:lnTo>
+                  <a:pt x="30480" y="0"/>
+                </a:lnTo>
+                <a:lnTo>
+                  <a:pt x="60960" y="0"/>
+                </a:lnTo>
+                <a:lnTo>
+                  <a:pt x="91440" y="0"/>
+                </a:lnTo>
+                <a:lnTo>
+                  <a:pt x="121920" y="0"/>
+                </a:lnTo>
+                <a:lnTo>
+                  <a:pt x="152400" y="0"/>
+                </a:lnTo>
+                <a:lnTo>
+                  <a:pt x="182880" y="0"/>
+                </a:lnTo>
+                <a:lnTo>
+                  <a:pt x="213360" y="0"/>
+                </a:lnTo>
+                <a:lnTo>
+                  <a:pt x="243840" y="0"/>
+                </a:lnTo>
+                <a:lnTo>
+                  <a:pt x="274320" y="0"/>
+                </a:lnTo>
+                <a:lnTo>
+                  <a:pt x="304800" y="0"/>
+                </a:lnTo>
+                <a:lnTo>
+                  <a:pt x="335280" y="0"/>
+                </a:lnTo>
+                <a:lnTo>
+                  <a:pt x="365760" y="0"/>
+                </a:lnTo>
+                <a:lnTo>
+                  <a:pt x="396240" y="0"/>
+                </a:lnTo>
+                <a:lnTo>
+                  <a:pt x="426720" y="0"/>
+                </a:lnTo>
+                <a:lnTo>
+                  <a:pt x="457200" y="0"/>
+                </a:lnTo>
+                <a:lnTo>
+                  <a:pt x="487680" y="0"/>
+                </a:lnTo>
+                <a:lnTo>
+                  <a:pt x="518160" y="0"/>
+                </a:lnTo>
+                <a:lnTo>
+                  <a:pt x="548640" y="0"/>
+                </a:lnTo>
+                <a:lnTo>
+                  <a:pt x="579120" y="0"/>
+                </a:lnTo>
+                <a:lnTo>
+                  <a:pt x="609600" y="0"/>
+                </a:lnTo>
+                <a:lnTo>
+                  <a:pt x="640080" y="0"/>
+                </a:lnTo>
+                <a:lnTo>
+                  <a:pt x="670560" y="0"/>
+                </a:lnTo>
+                <a:lnTo>
+                  <a:pt x="701040" y="0"/>
+                </a:lnTo>
+                <a:lnTo>
+                  <a:pt x="731520" y="0"/>
+                </a:lnTo>
+                <a:lnTo>
+                  <a:pt x="762000" y="0"/>
+                </a:lnTo>
+                <a:lnTo>
+                  <a:pt x="792480" y="0"/>
+                </a:lnTo>
+                <a:lnTo>
+                  <a:pt x="822960" y="0"/>
+                </a:lnTo>
+                <a:lnTo>
+                  <a:pt x="853440" y="0"/>
+                </a:lnTo>
+                <a:lnTo>
+                  <a:pt x="883920" y="0"/>
+                </a:lnTo>
+                <a:lnTo>
+                  <a:pt x="914400" y="0"/>
+                </a:lnTo>
+                <a:lnTo>
+                  <a:pt x="944880" y="0"/>
+                </a:lnTo>
+                <a:lnTo>
+                  <a:pt x="975360" y="0"/>
+                </a:lnTo>
+                <a:lnTo>
+                  <a:pt x="1005840" y="0"/>
+                </a:lnTo>
+                <a:lnTo>
+                  <a:pt x="1036320" y="0"/>
+                </a:lnTo>
+                <a:lnTo>
+                  <a:pt x="1066800" y="0"/>
+                </a:lnTo>
+                <a:lnTo>
+                  <a:pt x="1097280" y="0"/>
+                </a:lnTo>
+                <a:lnTo>
+                  <a:pt x="1127760" y="0"/>
+                </a:lnTo>
+                <a:lnTo>
+                  <a:pt x="1158240" y="0"/>
+                </a:lnTo>
+                <a:lnTo>
+                  <a:pt x="1188719" y="0"/>
+                </a:lnTo>
+                <a:lnTo>
+                  <a:pt x="1219199" y="0"/>
+                </a:lnTo>
+                <a:lnTo>
+                  <a:pt x="1249680" y="0"/>
+                </a:lnTo>
+                <a:lnTo>
+                  <a:pt x="1280160" y="0"/>
+                </a:lnTo>
+                <a:lnTo>
+                  <a:pt x="1310640" y="0"/>
+                </a:lnTo>
+                <a:lnTo>
+                  <a:pt x="1341120" y="0"/>
+                </a:lnTo>
+                <a:lnTo>
+                  <a:pt x="1371600" y="0"/>
+                </a:lnTo>
+                <a:lnTo>
+                  <a:pt x="1402080" y="0"/>
+                </a:lnTo>
+                <a:lnTo>
+                  <a:pt x="1432560" y="0"/>
+                </a:lnTo>
+                <a:lnTo>
+                  <a:pt x="1463040" y="0"/>
+                </a:lnTo>
+                <a:lnTo>
+                  <a:pt x="1493520" y="0"/>
+                </a:lnTo>
+                <a:lnTo>
+                  <a:pt x="1524000" y="0"/>
+                </a:lnTo>
+                <a:lnTo>
+                  <a:pt x="1554480" y="0"/>
+                </a:lnTo>
+                <a:lnTo>
+                  <a:pt x="1584960" y="0"/>
+                </a:lnTo>
+                <a:lnTo>
+                  <a:pt x="1615440" y="0"/>
+                </a:lnTo>
+                <a:lnTo>
+                  <a:pt x="1645919" y="0"/>
+                </a:lnTo>
+                <a:lnTo>
+                  <a:pt x="1676399" y="0"/>
+                </a:lnTo>
+                <a:lnTo>
+                  <a:pt x="1706879" y="0"/>
+                </a:lnTo>
+                <a:lnTo>
+                  <a:pt x="1737360" y="0"/>
+                </a:lnTo>
+                <a:lnTo>
+                  <a:pt x="1767840" y="0"/>
+                </a:lnTo>
+                <a:lnTo>
+                  <a:pt x="1798320" y="0"/>
+                </a:lnTo>
+                <a:lnTo>
+                  <a:pt x="1828800" y="0"/>
+                </a:lnTo>
+                <a:lnTo>
+                  <a:pt x="1859280" y="0"/>
+                </a:lnTo>
+                <a:lnTo>
+                  <a:pt x="1889760" y="0"/>
+                </a:lnTo>
+                <a:lnTo>
+                  <a:pt x="1920240" y="0"/>
+                </a:lnTo>
+                <a:lnTo>
+                  <a:pt x="1950720" y="0"/>
+                </a:lnTo>
+                <a:lnTo>
+                  <a:pt x="1981200" y="0"/>
+                </a:lnTo>
+                <a:lnTo>
+                  <a:pt x="2011680" y="0"/>
+                </a:lnTo>
+                <a:lnTo>
+                  <a:pt x="2042160" y="0"/>
+                </a:lnTo>
+                <a:lnTo>
+                  <a:pt x="2072640" y="0"/>
+                </a:lnTo>
+                <a:lnTo>
+                  <a:pt x="2103120" y="0"/>
+                </a:lnTo>
+                <a:lnTo>
+                  <a:pt x="2133599" y="0"/>
+                </a:lnTo>
+                <a:lnTo>
+                  <a:pt x="2164080" y="0"/>
+                </a:lnTo>
+                <a:lnTo>
+                  <a:pt x="2194560" y="0"/>
+                </a:lnTo>
+                <a:lnTo>
+                  <a:pt x="2225040" y="0"/>
+                </a:lnTo>
+                <a:lnTo>
+                  <a:pt x="2255520" y="0"/>
+                </a:lnTo>
+                <a:lnTo>
+                  <a:pt x="2286000" y="0"/>
+                </a:lnTo>
+                <a:lnTo>
+                  <a:pt x="2316480" y="0"/>
+                </a:lnTo>
+                <a:lnTo>
+                  <a:pt x="2346960" y="0"/>
+                </a:lnTo>
+                <a:lnTo>
+                  <a:pt x="2377440" y="0"/>
+                </a:lnTo>
+                <a:lnTo>
+                  <a:pt x="2407920" y="0"/>
+                </a:lnTo>
+                <a:lnTo>
+                  <a:pt x="2438400" y="0"/>
+                </a:lnTo>
+                <a:lnTo>
+                  <a:pt x="2468880" y="0"/>
+                </a:lnTo>
+                <a:lnTo>
+                  <a:pt x="2499360" y="0"/>
+                </a:lnTo>
+                <a:lnTo>
+                  <a:pt x="2529840" y="0"/>
+                </a:lnTo>
+                <a:lnTo>
+                  <a:pt x="2560319" y="0"/>
+                </a:lnTo>
+                <a:lnTo>
+                  <a:pt x="2590799" y="0"/>
+                </a:lnTo>
+                <a:lnTo>
+                  <a:pt x="2621280" y="0"/>
+                </a:lnTo>
+                <a:lnTo>
+                  <a:pt x="2651760" y="0"/>
+                </a:lnTo>
+                <a:lnTo>
+                  <a:pt x="2682240" y="0"/>
+                </a:lnTo>
+                <a:lnTo>
+                  <a:pt x="2712720" y="0"/>
+                </a:lnTo>
+                <a:lnTo>
+                  <a:pt x="2743200" y="0"/>
+                </a:lnTo>
+                <a:lnTo>
+                  <a:pt x="2773680" y="0"/>
+                </a:lnTo>
+                <a:lnTo>
+                  <a:pt x="2804160" y="0"/>
+                </a:lnTo>
+                <a:lnTo>
+                  <a:pt x="2834640" y="0"/>
+                </a:lnTo>
+                <a:lnTo>
+                  <a:pt x="2865120" y="0"/>
+                </a:lnTo>
+                <a:lnTo>
+                  <a:pt x="2895600" y="0"/>
+                </a:lnTo>
+                <a:lnTo>
+                  <a:pt x="2926080" y="0"/>
+                </a:lnTo>
+                <a:lnTo>
+                  <a:pt x="2956560" y="0"/>
+                </a:lnTo>
+                <a:lnTo>
+                  <a:pt x="2987040" y="0"/>
+                </a:lnTo>
+                <a:lnTo>
+                  <a:pt x="3017520" y="0"/>
+                </a:lnTo>
+                <a:lnTo>
+                  <a:pt x="3017520" y="0"/>
+                </a:lnTo>
+                <a:lnTo>
+                  <a:pt x="2987040" y="0"/>
+                </a:lnTo>
+                <a:lnTo>
+                  <a:pt x="2956560" y="38402"/>
+                </a:lnTo>
+                <a:lnTo>
+                  <a:pt x="2926080" y="93884"/>
+                </a:lnTo>
+                <a:lnTo>
+                  <a:pt x="2895600" y="148790"/>
+                </a:lnTo>
+                <a:lnTo>
+                  <a:pt x="2865120" y="203122"/>
+                </a:lnTo>
+                <a:lnTo>
+                  <a:pt x="2834640" y="256879"/>
+                </a:lnTo>
+                <a:lnTo>
+                  <a:pt x="2804160" y="310060"/>
+                </a:lnTo>
+                <a:lnTo>
+                  <a:pt x="2773680" y="362667"/>
+                </a:lnTo>
+                <a:lnTo>
+                  <a:pt x="2743200" y="414699"/>
+                </a:lnTo>
+                <a:lnTo>
+                  <a:pt x="2712720" y="466156"/>
+                </a:lnTo>
+                <a:lnTo>
+                  <a:pt x="2682240" y="517038"/>
+                </a:lnTo>
+                <a:lnTo>
+                  <a:pt x="2651760" y="567345"/>
+                </a:lnTo>
+                <a:lnTo>
+                  <a:pt x="2621280" y="617077"/>
+                </a:lnTo>
+                <a:lnTo>
+                  <a:pt x="2590799" y="666235"/>
+                </a:lnTo>
+                <a:lnTo>
+                  <a:pt x="2560319" y="714817"/>
+                </a:lnTo>
+                <a:lnTo>
+                  <a:pt x="2529840" y="762824"/>
+                </a:lnTo>
+                <a:lnTo>
+                  <a:pt x="2499360" y="810257"/>
+                </a:lnTo>
+                <a:lnTo>
+                  <a:pt x="2468880" y="857114"/>
+                </a:lnTo>
+                <a:lnTo>
+                  <a:pt x="2438400" y="903397"/>
+                </a:lnTo>
+                <a:lnTo>
+                  <a:pt x="2407920" y="949104"/>
+                </a:lnTo>
+                <a:lnTo>
+                  <a:pt x="2377440" y="994237"/>
+                </a:lnTo>
+                <a:lnTo>
+                  <a:pt x="2346960" y="1038795"/>
+                </a:lnTo>
+                <a:lnTo>
+                  <a:pt x="2316480" y="1082778"/>
+                </a:lnTo>
+                <a:lnTo>
+                  <a:pt x="2286000" y="1126185"/>
+                </a:lnTo>
+                <a:lnTo>
+                  <a:pt x="2255520" y="1169018"/>
+                </a:lnTo>
+                <a:lnTo>
+                  <a:pt x="2225040" y="1211276"/>
+                </a:lnTo>
+                <a:lnTo>
+                  <a:pt x="2194560" y="1252959"/>
+                </a:lnTo>
+                <a:lnTo>
+                  <a:pt x="2164080" y="1294067"/>
+                </a:lnTo>
+                <a:lnTo>
+                  <a:pt x="2133599" y="1334601"/>
+                </a:lnTo>
+                <a:lnTo>
+                  <a:pt x="2103120" y="1374559"/>
+                </a:lnTo>
+                <a:lnTo>
+                  <a:pt x="2072640" y="1413942"/>
+                </a:lnTo>
+                <a:lnTo>
+                  <a:pt x="2042160" y="1452750"/>
+                </a:lnTo>
+                <a:lnTo>
+                  <a:pt x="2011680" y="1490984"/>
+                </a:lnTo>
+                <a:lnTo>
+                  <a:pt x="1981200" y="1528642"/>
+                </a:lnTo>
+                <a:lnTo>
+                  <a:pt x="1950720" y="1565726"/>
+                </a:lnTo>
+                <a:lnTo>
+                  <a:pt x="1920240" y="1602234"/>
+                </a:lnTo>
+                <a:lnTo>
+                  <a:pt x="1889760" y="1638168"/>
+                </a:lnTo>
+                <a:lnTo>
+                  <a:pt x="1859280" y="1673527"/>
+                </a:lnTo>
+                <a:lnTo>
+                  <a:pt x="1828800" y="1708310"/>
+                </a:lnTo>
+                <a:lnTo>
+                  <a:pt x="1798320" y="1742519"/>
+                </a:lnTo>
+                <a:lnTo>
+                  <a:pt x="1767840" y="1776153"/>
+                </a:lnTo>
+                <a:lnTo>
+                  <a:pt x="1737360" y="1809212"/>
+                </a:lnTo>
+                <a:lnTo>
+                  <a:pt x="1706879" y="1841696"/>
+                </a:lnTo>
+                <a:lnTo>
+                  <a:pt x="1676399" y="1873605"/>
+                </a:lnTo>
+                <a:lnTo>
+                  <a:pt x="1645919" y="1904939"/>
+                </a:lnTo>
+                <a:lnTo>
+                  <a:pt x="1615440" y="1935699"/>
+                </a:lnTo>
+                <a:lnTo>
+                  <a:pt x="1584960" y="1965883"/>
+                </a:lnTo>
+                <a:lnTo>
+                  <a:pt x="1554480" y="1995492"/>
+                </a:lnTo>
+                <a:lnTo>
+                  <a:pt x="1524000" y="2024527"/>
+                </a:lnTo>
+                <a:lnTo>
+                  <a:pt x="1493520" y="2052986"/>
+                </a:lnTo>
+                <a:lnTo>
+                  <a:pt x="1463040" y="2080871"/>
+                </a:lnTo>
+                <a:lnTo>
+                  <a:pt x="1432560" y="2108180"/>
+                </a:lnTo>
+                <a:lnTo>
+                  <a:pt x="1402080" y="2134915"/>
+                </a:lnTo>
+                <a:lnTo>
+                  <a:pt x="1371600" y="2161074"/>
+                </a:lnTo>
+                <a:lnTo>
+                  <a:pt x="1341120" y="2186659"/>
+                </a:lnTo>
+                <a:lnTo>
+                  <a:pt x="1310640" y="2211669"/>
+                </a:lnTo>
+                <a:lnTo>
+                  <a:pt x="1280160" y="2236104"/>
+                </a:lnTo>
+                <a:lnTo>
+                  <a:pt x="1249680" y="2259964"/>
+                </a:lnTo>
+                <a:lnTo>
+                  <a:pt x="1219199" y="2283249"/>
+                </a:lnTo>
+                <a:lnTo>
+                  <a:pt x="1188719" y="2305959"/>
+                </a:lnTo>
+                <a:lnTo>
+                  <a:pt x="1158240" y="2328094"/>
+                </a:lnTo>
+                <a:lnTo>
+                  <a:pt x="1127760" y="2349654"/>
+                </a:lnTo>
+                <a:lnTo>
+                  <a:pt x="1097280" y="2370639"/>
+                </a:lnTo>
+                <a:lnTo>
+                  <a:pt x="1066800" y="2391050"/>
+                </a:lnTo>
+                <a:lnTo>
+                  <a:pt x="1036320" y="2410885"/>
+                </a:lnTo>
+                <a:lnTo>
+                  <a:pt x="1005840" y="2430146"/>
+                </a:lnTo>
+                <a:lnTo>
+                  <a:pt x="975360" y="2448831"/>
+                </a:lnTo>
+                <a:lnTo>
+                  <a:pt x="944880" y="2466942"/>
+                </a:lnTo>
+                <a:lnTo>
+                  <a:pt x="914400" y="2484477"/>
+                </a:lnTo>
+                <a:lnTo>
+                  <a:pt x="883920" y="2501438"/>
+                </a:lnTo>
+                <a:lnTo>
+                  <a:pt x="853440" y="2517824"/>
+                </a:lnTo>
+                <a:lnTo>
+                  <a:pt x="822960" y="2533634"/>
+                </a:lnTo>
+                <a:lnTo>
+                  <a:pt x="792480" y="2548870"/>
+                </a:lnTo>
+                <a:lnTo>
+                  <a:pt x="762000" y="2563531"/>
+                </a:lnTo>
+                <a:lnTo>
+                  <a:pt x="731520" y="2577617"/>
+                </a:lnTo>
+                <a:lnTo>
+                  <a:pt x="701040" y="2591128"/>
+                </a:lnTo>
+                <a:lnTo>
+                  <a:pt x="670560" y="2604064"/>
+                </a:lnTo>
+                <a:lnTo>
+                  <a:pt x="640080" y="2616426"/>
+                </a:lnTo>
+                <a:lnTo>
+                  <a:pt x="609600" y="2628212"/>
+                </a:lnTo>
+                <a:lnTo>
+                  <a:pt x="579120" y="2639423"/>
+                </a:lnTo>
+                <a:lnTo>
+                  <a:pt x="548640" y="2650059"/>
+                </a:lnTo>
+                <a:lnTo>
+                  <a:pt x="518160" y="2660121"/>
+                </a:lnTo>
+                <a:lnTo>
+                  <a:pt x="487680" y="2669607"/>
+                </a:lnTo>
+                <a:lnTo>
+                  <a:pt x="457200" y="2678519"/>
+                </a:lnTo>
+                <a:lnTo>
+                  <a:pt x="426720" y="2686856"/>
+                </a:lnTo>
+                <a:lnTo>
+                  <a:pt x="396240" y="2694617"/>
+                </a:lnTo>
+                <a:lnTo>
+                  <a:pt x="365760" y="2701804"/>
+                </a:lnTo>
+                <a:lnTo>
+                  <a:pt x="335280" y="2708416"/>
+                </a:lnTo>
+                <a:lnTo>
+                  <a:pt x="304800" y="2714453"/>
+                </a:lnTo>
+                <a:lnTo>
+                  <a:pt x="274320" y="2719914"/>
+                </a:lnTo>
+                <a:lnTo>
+                  <a:pt x="243840" y="2724801"/>
+                </a:lnTo>
+                <a:lnTo>
+                  <a:pt x="213360" y="2729114"/>
+                </a:lnTo>
+                <a:lnTo>
+                  <a:pt x="182880" y="2732851"/>
+                </a:lnTo>
+                <a:lnTo>
+                  <a:pt x="152400" y="2736013"/>
+                </a:lnTo>
+                <a:lnTo>
+                  <a:pt x="121920" y="2738600"/>
+                </a:lnTo>
+                <a:lnTo>
+                  <a:pt x="91440" y="2740612"/>
+                </a:lnTo>
+                <a:lnTo>
+                  <a:pt x="60960" y="2742050"/>
+                </a:lnTo>
+                <a:lnTo>
+                  <a:pt x="30480" y="2742912"/>
+                </a:lnTo>
+                <a:lnTo>
+                  <a:pt x="0" y="2743200"/>
+                </a:lnTo>
+                <a:close/>
+              </a:path>
+            </a:pathLst>
+          </a:custGeom>
+          <a:solidFill>
+            <a:srgbClr val="8EDBD4">
+              <a:alpha val="18000"/>
+            </a:srgbClr>
+          </a:solidFill>
+          <a:ln w="10160">
+            <a:solidFill>
+              <a:srgbClr val="8EDBD4">
+                <a:alpha val="18000"/>
+              </a:srgbClr>
+            </a:solidFill>
+          </a:ln>
+          <a:effectLst/>
+        </p:spPr>
+        <p:txBody>
+          <a:bodyPr rtlCol="0" anchor="ctr"/>
+          <a:lstStyle/>
+          <a:p>
+            <a:pPr algn="ctr"/>
+          </a:p>
+        </p:txBody>
+      </p:sp>
+      <p:sp>
+        <p:nvSpPr>
+          <p:cNvPr id="28" name="C3-E32 text 26" descr="sci-ppt:o026"/>
+          <p:cNvSpPr txBox="1"/>
+          <p:nvPr/>
+        </p:nvSpPr>
+        <p:spPr>
+          <a:xfrm>
+            <a:off x="7680960" y="960120"/>
+            <a:ext cx="4023360" cy="247142"/>
+          </a:xfrm>
+          <a:prstGeom prst="rect">
             <a:avLst/>
           </a:prstGeom>
-          <a:ln w="25400">
+          <a:noFill/>
+          <a:effectLst/>
+        </p:spPr>
+        <p:txBody>
+          <a:bodyPr wrap="none" lIns="18288" rIns="18288" tIns="18288" bIns="18288" anchor="t">
+            <a:spAutoFit/>
+          </a:bodyPr>
+          <a:lstStyle/>
+          <a:p>
+            <a:pPr algn="l">
+              <a:spcAft>
+                <a:spcPts val="0"/>
+              </a:spcAft>
+            </a:pPr>
+            <a:r>
+              <a:rPr sz="1300" b="1" i="0">
+                <a:solidFill>
+                  <a:srgbClr val="8EDBD4"/>
+                </a:solidFill>
+                <a:latin typeface="Arial"/>
+              </a:rPr>
+              <a:t>P² ≤ 2mE: the allowed region</a:t>
+            </a:r>
+          </a:p>
+        </p:txBody>
+      </p:sp>
+      <p:sp>
+        <p:nvSpPr>
+          <p:cNvPr id="29" name="C3-E32 round_rect 27" descr="sci-ppt:o027"/>
+          <p:cNvSpPr/>
+          <p:nvPr/>
+        </p:nvSpPr>
+        <p:spPr>
+          <a:xfrm>
+            <a:off x="365760" y="914400"/>
+            <a:ext cx="7040880" cy="1737360"/>
+          </a:xfrm>
+          <a:prstGeom prst="roundRect">
+            <a:avLst/>
+          </a:prstGeom>
+          <a:solidFill>
+            <a:srgbClr val="213E4B"/>
+          </a:solidFill>
+          <a:ln w="20320">
             <a:solidFill>
               <a:srgbClr val="8EDBD4"/>
             </a:solidFill>
           </a:ln>
           <a:effectLst/>
         </p:spPr>
-      </p:cxnSp>
-      <p:cxnSp>
-        <p:nvCxnSpPr>
-          <p:cNvPr id="24" name="C3-E32 line 22" descr="sci-ppt:o022"/>
-          <p:cNvCxnSpPr/>
-          <p:nvPr/>
-        </p:nvCxnSpPr>
-        <p:spPr>
-          <a:xfrm>
-            <a:off x="6597396" y="1631892"/>
-            <a:ext cx="59436" cy="4264"/>
-          </a:xfrm>
-          <a:prstGeom prst="line">
-            <a:avLst/>
-          </a:prstGeom>
-          <a:ln w="25400">
-            <a:solidFill>
-              <a:srgbClr val="8EDBD4"/>
-            </a:solidFill>
-          </a:ln>
-          <a:effectLst/>
-        </p:spPr>
-      </p:cxnSp>
-      <p:cxnSp>
-        <p:nvCxnSpPr>
-          <p:cNvPr id="25" name="C3-E32 line 23" descr="sci-ppt:o023"/>
-          <p:cNvCxnSpPr/>
-          <p:nvPr/>
-        </p:nvCxnSpPr>
-        <p:spPr>
-          <a:xfrm flipV="1">
-            <a:off x="6656832" y="1631029"/>
-            <a:ext cx="59436" cy="5127"/>
-          </a:xfrm>
-          <a:prstGeom prst="line">
-            <a:avLst/>
-          </a:prstGeom>
-          <a:ln w="25400">
-            <a:solidFill>
-              <a:srgbClr val="8EDBD4"/>
-            </a:solidFill>
-          </a:ln>
-          <a:effectLst/>
-        </p:spPr>
-      </p:cxnSp>
-      <p:cxnSp>
-        <p:nvCxnSpPr>
-          <p:cNvPr id="26" name="C3-E32 line 24" descr="sci-ppt:o024"/>
-          <p:cNvCxnSpPr/>
-          <p:nvPr/>
-        </p:nvCxnSpPr>
-        <p:spPr>
-          <a:xfrm flipV="1">
-            <a:off x="6716268" y="1616458"/>
-            <a:ext cx="59436" cy="14571"/>
-          </a:xfrm>
-          <a:prstGeom prst="line">
-            <a:avLst/>
-          </a:prstGeom>
-          <a:ln w="25400">
-            <a:solidFill>
-              <a:srgbClr val="8EDBD4"/>
-            </a:solidFill>
-          </a:ln>
-          <a:effectLst/>
-        </p:spPr>
-      </p:cxnSp>
-      <p:cxnSp>
-        <p:nvCxnSpPr>
-          <p:cNvPr id="27" name="C3-E32 line 25" descr="sci-ppt:o025"/>
-          <p:cNvCxnSpPr/>
-          <p:nvPr/>
-        </p:nvCxnSpPr>
-        <p:spPr>
-          <a:xfrm flipV="1">
-            <a:off x="6775704" y="1593113"/>
-            <a:ext cx="59436" cy="23345"/>
-          </a:xfrm>
-          <a:prstGeom prst="line">
-            <a:avLst/>
-          </a:prstGeom>
-          <a:ln w="25400">
-            <a:solidFill>
-              <a:srgbClr val="8EDBD4"/>
-            </a:solidFill>
-          </a:ln>
-          <a:effectLst/>
-        </p:spPr>
-      </p:cxnSp>
-      <p:cxnSp>
-        <p:nvCxnSpPr>
-          <p:cNvPr id="28" name="C3-E32 line 26" descr="sci-ppt:o026"/>
-          <p:cNvCxnSpPr/>
-          <p:nvPr/>
-        </p:nvCxnSpPr>
-        <p:spPr>
-          <a:xfrm flipV="1">
-            <a:off x="6835140" y="1562375"/>
-            <a:ext cx="59436" cy="30738"/>
-          </a:xfrm>
-          <a:prstGeom prst="line">
-            <a:avLst/>
-          </a:prstGeom>
-          <a:ln w="25400">
-            <a:solidFill>
-              <a:srgbClr val="8EDBD4"/>
-            </a:solidFill>
-          </a:ln>
-          <a:effectLst/>
-        </p:spPr>
-      </p:cxnSp>
-      <p:cxnSp>
-        <p:nvCxnSpPr>
-          <p:cNvPr id="29" name="C3-E32 line 27" descr="sci-ppt:o027"/>
-          <p:cNvCxnSpPr/>
-          <p:nvPr/>
-        </p:nvCxnSpPr>
-        <p:spPr>
-          <a:xfrm flipV="1">
-            <a:off x="6894576" y="1526249"/>
-            <a:ext cx="59436" cy="36126"/>
-          </a:xfrm>
-          <a:prstGeom prst="line">
-            <a:avLst/>
-          </a:prstGeom>
-          <a:ln w="25400">
-            <a:solidFill>
-              <a:srgbClr val="8EDBD4"/>
-            </a:solidFill>
-          </a:ln>
-          <a:effectLst/>
-        </p:spPr>
-      </p:cxnSp>
-      <p:cxnSp>
-        <p:nvCxnSpPr>
-          <p:cNvPr id="30" name="C3-E32 line 28" descr="sci-ppt:o028"/>
-          <p:cNvCxnSpPr/>
-          <p:nvPr/>
-        </p:nvCxnSpPr>
-        <p:spPr>
-          <a:xfrm flipV="1">
-            <a:off x="6954012" y="1487242"/>
-            <a:ext cx="59436" cy="39007"/>
-          </a:xfrm>
-          <a:prstGeom prst="line">
-            <a:avLst/>
-          </a:prstGeom>
-          <a:ln w="25400">
-            <a:solidFill>
-              <a:srgbClr val="8EDBD4"/>
-            </a:solidFill>
-          </a:ln>
-          <a:effectLst/>
-        </p:spPr>
-      </p:cxnSp>
-      <p:cxnSp>
-        <p:nvCxnSpPr>
-          <p:cNvPr id="31" name="C3-E32 line 29" descr="sci-ppt:o029"/>
-          <p:cNvCxnSpPr/>
-          <p:nvPr/>
-        </p:nvCxnSpPr>
-        <p:spPr>
-          <a:xfrm flipV="1">
-            <a:off x="7013448" y="1448186"/>
-            <a:ext cx="59436" cy="39056"/>
-          </a:xfrm>
-          <a:prstGeom prst="line">
-            <a:avLst/>
-          </a:prstGeom>
-          <a:ln w="25400">
-            <a:solidFill>
-              <a:srgbClr val="8EDBD4"/>
-            </a:solidFill>
-          </a:ln>
-          <a:effectLst/>
-        </p:spPr>
-      </p:cxnSp>
-      <p:cxnSp>
-        <p:nvCxnSpPr>
-          <p:cNvPr id="32" name="C3-E32 line 30" descr="sci-ppt:o030"/>
-          <p:cNvCxnSpPr/>
-          <p:nvPr/>
-        </p:nvCxnSpPr>
-        <p:spPr>
-          <a:xfrm flipV="1">
-            <a:off x="7072884" y="1412032"/>
-            <a:ext cx="59436" cy="36154"/>
-          </a:xfrm>
-          <a:prstGeom prst="line">
-            <a:avLst/>
-          </a:prstGeom>
-          <a:ln w="25400">
-            <a:solidFill>
-              <a:srgbClr val="8EDBD4"/>
-            </a:solidFill>
-          </a:ln>
-          <a:effectLst/>
-        </p:spPr>
-      </p:cxnSp>
-      <p:cxnSp>
-        <p:nvCxnSpPr>
-          <p:cNvPr id="33" name="C3-E32 line 31" descr="sci-ppt:o031"/>
-          <p:cNvCxnSpPr/>
-          <p:nvPr/>
-        </p:nvCxnSpPr>
-        <p:spPr>
-          <a:xfrm flipV="1">
-            <a:off x="7132320" y="1381631"/>
-            <a:ext cx="59436" cy="30401"/>
-          </a:xfrm>
-          <a:prstGeom prst="line">
-            <a:avLst/>
-          </a:prstGeom>
-          <a:ln w="25400">
-            <a:solidFill>
-              <a:srgbClr val="8EDBD4"/>
-            </a:solidFill>
-          </a:ln>
-          <a:effectLst/>
-        </p:spPr>
-      </p:cxnSp>
-      <p:cxnSp>
-        <p:nvCxnSpPr>
-          <p:cNvPr id="34" name="C3-E32 line 32" descr="sci-ppt:o032"/>
-          <p:cNvCxnSpPr/>
-          <p:nvPr/>
-        </p:nvCxnSpPr>
-        <p:spPr>
-          <a:xfrm flipV="1">
-            <a:off x="7191756" y="1359506"/>
-            <a:ext cx="59436" cy="22125"/>
-          </a:xfrm>
-          <a:prstGeom prst="line">
-            <a:avLst/>
-          </a:prstGeom>
-          <a:ln w="25400">
-            <a:solidFill>
-              <a:srgbClr val="8EDBD4"/>
-            </a:solidFill>
-          </a:ln>
-          <a:effectLst/>
-        </p:spPr>
-      </p:cxnSp>
-      <p:cxnSp>
-        <p:nvCxnSpPr>
-          <p:cNvPr id="35" name="C3-E32 line 33" descr="sci-ppt:o033"/>
-          <p:cNvCxnSpPr/>
-          <p:nvPr/>
-        </p:nvCxnSpPr>
-        <p:spPr>
-          <a:xfrm flipV="1">
-            <a:off x="7251192" y="1347648"/>
-            <a:ext cx="59436" cy="11858"/>
-          </a:xfrm>
-          <a:prstGeom prst="line">
-            <a:avLst/>
-          </a:prstGeom>
-          <a:ln w="25400">
-            <a:solidFill>
-              <a:srgbClr val="8EDBD4"/>
-            </a:solidFill>
-          </a:ln>
-          <a:effectLst/>
-        </p:spPr>
-      </p:cxnSp>
-      <p:cxnSp>
-        <p:nvCxnSpPr>
-          <p:cNvPr id="36" name="C3-E32 line 34" descr="sci-ppt:o034"/>
-          <p:cNvCxnSpPr/>
-          <p:nvPr/>
-        </p:nvCxnSpPr>
-        <p:spPr>
-          <a:xfrm flipV="1">
-            <a:off x="7310628" y="1347345"/>
-            <a:ext cx="59436" cy="303"/>
-          </a:xfrm>
-          <a:prstGeom prst="line">
-            <a:avLst/>
-          </a:prstGeom>
-          <a:ln w="25400">
-            <a:solidFill>
-              <a:srgbClr val="8EDBD4"/>
-            </a:solidFill>
-          </a:ln>
-          <a:effectLst/>
-        </p:spPr>
-      </p:cxnSp>
-      <p:cxnSp>
-        <p:nvCxnSpPr>
-          <p:cNvPr id="37" name="C3-E32 line 35" descr="sci-ppt:o035"/>
-          <p:cNvCxnSpPr/>
-          <p:nvPr/>
-        </p:nvCxnSpPr>
-        <p:spPr>
-          <a:xfrm>
-            <a:off x="7370064" y="1347345"/>
-            <a:ext cx="59436" cy="11711"/>
-          </a:xfrm>
-          <a:prstGeom prst="line">
-            <a:avLst/>
-          </a:prstGeom>
-          <a:ln w="25400">
-            <a:solidFill>
-              <a:srgbClr val="8EDBD4"/>
-            </a:solidFill>
-          </a:ln>
-          <a:effectLst/>
-        </p:spPr>
-      </p:cxnSp>
-      <p:cxnSp>
-        <p:nvCxnSpPr>
-          <p:cNvPr id="38" name="C3-E32 line 36" descr="sci-ppt:o036"/>
-          <p:cNvCxnSpPr/>
-          <p:nvPr/>
-        </p:nvCxnSpPr>
-        <p:spPr>
-          <a:xfrm>
-            <a:off x="7429500" y="1359056"/>
-            <a:ext cx="59436" cy="23290"/>
-          </a:xfrm>
-          <a:prstGeom prst="line">
-            <a:avLst/>
-          </a:prstGeom>
-          <a:ln w="25400">
-            <a:solidFill>
-              <a:srgbClr val="8EDBD4"/>
-            </a:solidFill>
-          </a:ln>
-          <a:effectLst/>
-        </p:spPr>
-      </p:cxnSp>
-      <p:cxnSp>
-        <p:nvCxnSpPr>
-          <p:cNvPr id="39" name="C3-E32 line 37" descr="sci-ppt:o037"/>
-          <p:cNvCxnSpPr/>
-          <p:nvPr/>
-        </p:nvCxnSpPr>
-        <p:spPr>
-          <a:xfrm>
-            <a:off x="7488936" y="1382346"/>
-            <a:ext cx="59436" cy="33542"/>
-          </a:xfrm>
-          <a:prstGeom prst="line">
-            <a:avLst/>
-          </a:prstGeom>
-          <a:ln w="25400">
-            <a:solidFill>
-              <a:srgbClr val="8EDBD4"/>
-            </a:solidFill>
-          </a:ln>
-          <a:effectLst/>
-        </p:spPr>
-      </p:cxnSp>
-      <p:cxnSp>
-        <p:nvCxnSpPr>
-          <p:cNvPr id="40" name="C3-E32 line 38" descr="sci-ppt:o038"/>
-          <p:cNvCxnSpPr/>
-          <p:nvPr/>
-        </p:nvCxnSpPr>
-        <p:spPr>
-          <a:xfrm>
-            <a:off x="7548372" y="1415888"/>
-            <a:ext cx="59436" cy="41646"/>
-          </a:xfrm>
-          <a:prstGeom prst="line">
-            <a:avLst/>
-          </a:prstGeom>
-          <a:ln w="25400">
-            <a:solidFill>
-              <a:srgbClr val="8EDBD4"/>
-            </a:solidFill>
-          </a:ln>
-          <a:effectLst/>
-        </p:spPr>
-      </p:cxnSp>
-      <p:cxnSp>
-        <p:nvCxnSpPr>
-          <p:cNvPr id="41" name="C3-E32 line 39" descr="sci-ppt:o039"/>
-          <p:cNvCxnSpPr/>
-          <p:nvPr/>
-        </p:nvCxnSpPr>
-        <p:spPr>
-          <a:xfrm>
-            <a:off x="7607808" y="1457534"/>
-            <a:ext cx="59436" cy="46913"/>
-          </a:xfrm>
-          <a:prstGeom prst="line">
-            <a:avLst/>
-          </a:prstGeom>
-          <a:ln w="25400">
-            <a:solidFill>
-              <a:srgbClr val="8EDBD4"/>
-            </a:solidFill>
-          </a:ln>
-          <a:effectLst/>
-        </p:spPr>
-      </p:cxnSp>
-      <p:cxnSp>
-        <p:nvCxnSpPr>
-          <p:cNvPr id="42" name="C3-E32 line 40" descr="sci-ppt:o040"/>
-          <p:cNvCxnSpPr/>
-          <p:nvPr/>
-        </p:nvCxnSpPr>
-        <p:spPr>
-          <a:xfrm>
-            <a:off x="7667244" y="1504447"/>
-            <a:ext cx="59435" cy="48852"/>
-          </a:xfrm>
-          <a:prstGeom prst="line">
-            <a:avLst/>
-          </a:prstGeom>
-          <a:ln w="25400">
-            <a:solidFill>
-              <a:srgbClr val="8EDBD4"/>
-            </a:solidFill>
-          </a:ln>
-          <a:effectLst/>
-        </p:spPr>
-      </p:cxnSp>
-      <p:cxnSp>
-        <p:nvCxnSpPr>
-          <p:cNvPr id="43" name="C3-E32 line 41" descr="sci-ppt:o041"/>
-          <p:cNvCxnSpPr/>
-          <p:nvPr/>
-        </p:nvCxnSpPr>
-        <p:spPr>
-          <a:xfrm>
-            <a:off x="7726679" y="1553299"/>
-            <a:ext cx="59437" cy="47201"/>
-          </a:xfrm>
-          <a:prstGeom prst="line">
-            <a:avLst/>
-          </a:prstGeom>
-          <a:ln w="25400">
-            <a:solidFill>
-              <a:srgbClr val="8EDBD4"/>
-            </a:solidFill>
-          </a:ln>
-          <a:effectLst/>
-        </p:spPr>
-      </p:cxnSp>
-      <p:cxnSp>
-        <p:nvCxnSpPr>
-          <p:cNvPr id="44" name="C3-E32 line 42" descr="sci-ppt:o042"/>
-          <p:cNvCxnSpPr/>
-          <p:nvPr/>
-        </p:nvCxnSpPr>
-        <p:spPr>
-          <a:xfrm>
-            <a:off x="7786116" y="1600500"/>
-            <a:ext cx="59436" cy="41969"/>
-          </a:xfrm>
-          <a:prstGeom prst="line">
-            <a:avLst/>
-          </a:prstGeom>
-          <a:ln w="25400">
-            <a:solidFill>
-              <a:srgbClr val="8EDBD4"/>
-            </a:solidFill>
-          </a:ln>
-          <a:effectLst/>
-        </p:spPr>
-      </p:cxnSp>
-      <p:cxnSp>
-        <p:nvCxnSpPr>
-          <p:cNvPr id="45" name="C3-E32 line 43" descr="sci-ppt:o043"/>
-          <p:cNvCxnSpPr/>
-          <p:nvPr/>
-        </p:nvCxnSpPr>
-        <p:spPr>
-          <a:xfrm>
-            <a:off x="7845552" y="1642469"/>
-            <a:ext cx="59436" cy="33429"/>
-          </a:xfrm>
-          <a:prstGeom prst="line">
-            <a:avLst/>
-          </a:prstGeom>
-          <a:ln w="25400">
-            <a:solidFill>
-              <a:srgbClr val="8EDBD4"/>
-            </a:solidFill>
-          </a:ln>
-          <a:effectLst/>
-        </p:spPr>
-      </p:cxnSp>
-      <p:cxnSp>
-        <p:nvCxnSpPr>
-          <p:cNvPr id="46" name="C3-E32 line 44" descr="sci-ppt:o044"/>
-          <p:cNvCxnSpPr/>
-          <p:nvPr/>
-        </p:nvCxnSpPr>
-        <p:spPr>
-          <a:xfrm>
-            <a:off x="7904988" y="1675898"/>
-            <a:ext cx="59436" cy="22119"/>
-          </a:xfrm>
-          <a:prstGeom prst="line">
-            <a:avLst/>
-          </a:prstGeom>
-          <a:ln w="25400">
-            <a:solidFill>
-              <a:srgbClr val="8EDBD4"/>
-            </a:solidFill>
-          </a:ln>
-          <a:effectLst/>
-        </p:spPr>
-      </p:cxnSp>
-      <p:cxnSp>
-        <p:nvCxnSpPr>
-          <p:cNvPr id="47" name="C3-E32 line 45" descr="sci-ppt:o045"/>
-          <p:cNvCxnSpPr/>
-          <p:nvPr/>
-        </p:nvCxnSpPr>
-        <p:spPr>
-          <a:xfrm>
-            <a:off x="7964424" y="1698017"/>
-            <a:ext cx="59436" cy="8799"/>
-          </a:xfrm>
-          <a:prstGeom prst="line">
-            <a:avLst/>
-          </a:prstGeom>
-          <a:ln w="25400">
-            <a:solidFill>
-              <a:srgbClr val="8EDBD4"/>
-            </a:solidFill>
-          </a:ln>
-          <a:effectLst/>
-        </p:spPr>
-      </p:cxnSp>
-      <p:cxnSp>
-        <p:nvCxnSpPr>
-          <p:cNvPr id="48" name="C3-E32 line 46" descr="sci-ppt:o046"/>
-          <p:cNvCxnSpPr/>
-          <p:nvPr/>
-        </p:nvCxnSpPr>
-        <p:spPr>
-          <a:xfrm flipV="1">
-            <a:off x="8023860" y="1701224"/>
-            <a:ext cx="59436" cy="5592"/>
-          </a:xfrm>
-          <a:prstGeom prst="line">
-            <a:avLst/>
-          </a:prstGeom>
-          <a:ln w="25400">
-            <a:solidFill>
-              <a:srgbClr val="8EDBD4"/>
-            </a:solidFill>
-          </a:ln>
-          <a:effectLst/>
-        </p:spPr>
-      </p:cxnSp>
-      <p:cxnSp>
-        <p:nvCxnSpPr>
-          <p:cNvPr id="49" name="C3-E32 line 47" descr="sci-ppt:o047"/>
-          <p:cNvCxnSpPr/>
-          <p:nvPr/>
-        </p:nvCxnSpPr>
-        <p:spPr>
-          <a:xfrm flipV="1">
-            <a:off x="8083296" y="1681214"/>
-            <a:ext cx="59436" cy="20010"/>
-          </a:xfrm>
-          <a:prstGeom prst="line">
-            <a:avLst/>
-          </a:prstGeom>
-          <a:ln w="25400">
-            <a:solidFill>
-              <a:srgbClr val="8EDBD4"/>
-            </a:solidFill>
-          </a:ln>
-          <a:effectLst/>
-        </p:spPr>
-      </p:cxnSp>
-      <p:cxnSp>
-        <p:nvCxnSpPr>
-          <p:cNvPr id="50" name="C3-E32 line 48" descr="sci-ppt:o048"/>
-          <p:cNvCxnSpPr/>
-          <p:nvPr/>
-        </p:nvCxnSpPr>
-        <p:spPr>
-          <a:xfrm flipV="1">
-            <a:off x="8142732" y="1647836"/>
-            <a:ext cx="59436" cy="33378"/>
-          </a:xfrm>
-          <a:prstGeom prst="line">
-            <a:avLst/>
-          </a:prstGeom>
-          <a:ln w="25400">
-            <a:solidFill>
-              <a:srgbClr val="8EDBD4"/>
-            </a:solidFill>
-          </a:ln>
-          <a:effectLst/>
-        </p:spPr>
-      </p:cxnSp>
-      <p:cxnSp>
-        <p:nvCxnSpPr>
-          <p:cNvPr id="51" name="C3-E32 line 49" descr="sci-ppt:o049"/>
-          <p:cNvCxnSpPr/>
-          <p:nvPr/>
-        </p:nvCxnSpPr>
-        <p:spPr>
-          <a:xfrm flipV="1">
-            <a:off x="8202168" y="1603176"/>
-            <a:ext cx="59436" cy="44660"/>
-          </a:xfrm>
-          <a:prstGeom prst="line">
-            <a:avLst/>
-          </a:prstGeom>
-          <a:ln w="25400">
-            <a:solidFill>
-              <a:srgbClr val="8EDBD4"/>
-            </a:solidFill>
-          </a:ln>
-          <a:effectLst/>
-        </p:spPr>
-      </p:cxnSp>
-      <p:cxnSp>
-        <p:nvCxnSpPr>
-          <p:cNvPr id="52" name="C3-E32 line 50" descr="sci-ppt:o050"/>
-          <p:cNvCxnSpPr/>
-          <p:nvPr/>
-        </p:nvCxnSpPr>
-        <p:spPr>
-          <a:xfrm flipV="1">
-            <a:off x="8261604" y="1550222"/>
-            <a:ext cx="59436" cy="52954"/>
-          </a:xfrm>
-          <a:prstGeom prst="line">
-            <a:avLst/>
-          </a:prstGeom>
-          <a:ln w="25400">
-            <a:solidFill>
-              <a:srgbClr val="8EDBD4"/>
-            </a:solidFill>
-          </a:ln>
-          <a:effectLst/>
-        </p:spPr>
-      </p:cxnSp>
-      <p:cxnSp>
-        <p:nvCxnSpPr>
-          <p:cNvPr id="53" name="C3-E32 line 51" descr="sci-ppt:o051"/>
-          <p:cNvCxnSpPr/>
-          <p:nvPr/>
-        </p:nvCxnSpPr>
-        <p:spPr>
-          <a:xfrm flipV="1">
-            <a:off x="8321040" y="1492668"/>
-            <a:ext cx="59435" cy="57554"/>
-          </a:xfrm>
-          <a:prstGeom prst="line">
-            <a:avLst/>
-          </a:prstGeom>
-          <a:ln w="25400">
-            <a:solidFill>
-              <a:srgbClr val="8EDBD4"/>
-            </a:solidFill>
-          </a:ln>
-          <a:effectLst/>
-        </p:spPr>
-      </p:cxnSp>
-      <p:cxnSp>
-        <p:nvCxnSpPr>
-          <p:cNvPr id="54" name="C3-E32 line 52" descr="sci-ppt:o052"/>
-          <p:cNvCxnSpPr/>
-          <p:nvPr/>
-        </p:nvCxnSpPr>
-        <p:spPr>
-          <a:xfrm flipV="1">
-            <a:off x="8380475" y="1434659"/>
-            <a:ext cx="59437" cy="58009"/>
-          </a:xfrm>
-          <a:prstGeom prst="line">
-            <a:avLst/>
-          </a:prstGeom>
-          <a:ln w="25400">
-            <a:solidFill>
-              <a:srgbClr val="8EDBD4"/>
-            </a:solidFill>
-          </a:ln>
-          <a:effectLst/>
-        </p:spPr>
-      </p:cxnSp>
-      <p:cxnSp>
-        <p:nvCxnSpPr>
-          <p:cNvPr id="55" name="C3-E32 line 53" descr="sci-ppt:o053"/>
-          <p:cNvCxnSpPr/>
-          <p:nvPr/>
-        </p:nvCxnSpPr>
-        <p:spPr>
-          <a:xfrm flipV="1">
-            <a:off x="8439912" y="1380488"/>
-            <a:ext cx="59436" cy="54171"/>
-          </a:xfrm>
-          <a:prstGeom prst="line">
-            <a:avLst/>
-          </a:prstGeom>
-          <a:ln w="25400">
-            <a:solidFill>
-              <a:srgbClr val="8EDBD4"/>
-            </a:solidFill>
-          </a:ln>
-          <a:effectLst/>
-        </p:spPr>
-      </p:cxnSp>
-      <p:cxnSp>
-        <p:nvCxnSpPr>
-          <p:cNvPr id="56" name="C3-E32 line 54" descr="sci-ppt:o054"/>
-          <p:cNvCxnSpPr/>
-          <p:nvPr/>
-        </p:nvCxnSpPr>
-        <p:spPr>
-          <a:xfrm flipV="1">
-            <a:off x="8499348" y="1334283"/>
-            <a:ext cx="59436" cy="46205"/>
-          </a:xfrm>
-          <a:prstGeom prst="line">
-            <a:avLst/>
-          </a:prstGeom>
-          <a:ln w="25400">
-            <a:solidFill>
-              <a:srgbClr val="8EDBD4"/>
-            </a:solidFill>
-          </a:ln>
-          <a:effectLst/>
-        </p:spPr>
-      </p:cxnSp>
-      <p:cxnSp>
-        <p:nvCxnSpPr>
-          <p:cNvPr id="57" name="C3-E32 line 55" descr="sci-ppt:o055"/>
-          <p:cNvCxnSpPr/>
-          <p:nvPr/>
-        </p:nvCxnSpPr>
-        <p:spPr>
-          <a:xfrm flipV="1">
-            <a:off x="8558784" y="1299690"/>
-            <a:ext cx="59436" cy="34593"/>
-          </a:xfrm>
-          <a:prstGeom prst="line">
-            <a:avLst/>
-          </a:prstGeom>
-          <a:ln w="25400">
-            <a:solidFill>
-              <a:srgbClr val="8EDBD4"/>
-            </a:solidFill>
-          </a:ln>
-          <a:effectLst/>
-        </p:spPr>
-      </p:cxnSp>
-      <p:cxnSp>
-        <p:nvCxnSpPr>
-          <p:cNvPr id="58" name="C3-E32 line 56" descr="sci-ppt:o056"/>
-          <p:cNvCxnSpPr/>
-          <p:nvPr/>
-        </p:nvCxnSpPr>
-        <p:spPr>
-          <a:xfrm flipV="1">
-            <a:off x="8618220" y="1279589"/>
-            <a:ext cx="59436" cy="20101"/>
-          </a:xfrm>
-          <a:prstGeom prst="line">
-            <a:avLst/>
-          </a:prstGeom>
-          <a:ln w="25400">
-            <a:solidFill>
-              <a:srgbClr val="8EDBD4"/>
-            </a:solidFill>
-          </a:ln>
-          <a:effectLst/>
-        </p:spPr>
-      </p:cxnSp>
-      <p:cxnSp>
-        <p:nvCxnSpPr>
-          <p:cNvPr id="59" name="C3-E32 line 57" descr="sci-ppt:o057"/>
-          <p:cNvCxnSpPr/>
-          <p:nvPr/>
-        </p:nvCxnSpPr>
-        <p:spPr>
-          <a:xfrm flipV="1">
-            <a:off x="8677656" y="1275855"/>
-            <a:ext cx="59436" cy="3734"/>
-          </a:xfrm>
-          <a:prstGeom prst="line">
-            <a:avLst/>
-          </a:prstGeom>
-          <a:ln w="25400">
-            <a:solidFill>
-              <a:srgbClr val="8EDBD4"/>
-            </a:solidFill>
-          </a:ln>
-          <a:effectLst/>
-        </p:spPr>
-      </p:cxnSp>
-      <p:cxnSp>
-        <p:nvCxnSpPr>
-          <p:cNvPr id="60" name="C3-E32 line 58" descr="sci-ppt:o058"/>
-          <p:cNvCxnSpPr/>
-          <p:nvPr/>
-        </p:nvCxnSpPr>
-        <p:spPr>
-          <a:xfrm>
-            <a:off x="8737092" y="1275855"/>
-            <a:ext cx="59436" cy="13342"/>
-          </a:xfrm>
-          <a:prstGeom prst="line">
-            <a:avLst/>
-          </a:prstGeom>
-          <a:ln w="25400">
-            <a:solidFill>
-              <a:srgbClr val="8EDBD4"/>
-            </a:solidFill>
-          </a:ln>
-          <a:effectLst/>
-        </p:spPr>
-      </p:cxnSp>
-      <p:cxnSp>
-        <p:nvCxnSpPr>
-          <p:cNvPr id="61" name="C3-E32 line 59" descr="sci-ppt:o059"/>
-          <p:cNvCxnSpPr/>
-          <p:nvPr/>
-        </p:nvCxnSpPr>
-        <p:spPr>
-          <a:xfrm>
-            <a:off x="8796528" y="1289197"/>
-            <a:ext cx="59436" cy="29876"/>
-          </a:xfrm>
-          <a:prstGeom prst="line">
-            <a:avLst/>
-          </a:prstGeom>
-          <a:ln w="25400">
-            <a:solidFill>
-              <a:srgbClr val="8EDBD4"/>
-            </a:solidFill>
-          </a:ln>
-          <a:effectLst/>
-        </p:spPr>
-      </p:cxnSp>
-      <p:cxnSp>
-        <p:nvCxnSpPr>
-          <p:cNvPr id="62" name="C3-E32 line 60" descr="sci-ppt:o060"/>
-          <p:cNvCxnSpPr/>
-          <p:nvPr/>
-        </p:nvCxnSpPr>
-        <p:spPr>
-          <a:xfrm>
-            <a:off x="8855964" y="1319073"/>
-            <a:ext cx="59436" cy="44621"/>
-          </a:xfrm>
-          <a:prstGeom prst="line">
-            <a:avLst/>
-          </a:prstGeom>
-          <a:ln w="25400">
-            <a:solidFill>
-              <a:srgbClr val="8EDBD4"/>
-            </a:solidFill>
-          </a:ln>
-          <a:effectLst/>
-        </p:spPr>
-      </p:cxnSp>
-      <p:cxnSp>
-        <p:nvCxnSpPr>
-          <p:cNvPr id="63" name="C3-E32 line 61" descr="sci-ppt:o061"/>
-          <p:cNvCxnSpPr/>
-          <p:nvPr/>
-        </p:nvCxnSpPr>
-        <p:spPr>
-          <a:xfrm>
-            <a:off x="8915400" y="1363694"/>
-            <a:ext cx="59436" cy="56439"/>
-          </a:xfrm>
-          <a:prstGeom prst="line">
-            <a:avLst/>
-          </a:prstGeom>
-          <a:ln w="25400">
-            <a:solidFill>
-              <a:srgbClr val="8EDBD4"/>
-            </a:solidFill>
-          </a:ln>
-          <a:effectLst/>
-        </p:spPr>
-      </p:cxnSp>
-      <p:cxnSp>
-        <p:nvCxnSpPr>
-          <p:cNvPr id="64" name="C3-E32 line 62" descr="sci-ppt:o062"/>
-          <p:cNvCxnSpPr/>
-          <p:nvPr/>
-        </p:nvCxnSpPr>
-        <p:spPr>
-          <a:xfrm>
-            <a:off x="8974836" y="1420133"/>
-            <a:ext cx="59436" cy="64379"/>
-          </a:xfrm>
-          <a:prstGeom prst="line">
-            <a:avLst/>
-          </a:prstGeom>
-          <a:ln w="25400">
-            <a:solidFill>
-              <a:srgbClr val="8EDBD4"/>
-            </a:solidFill>
-          </a:ln>
-          <a:effectLst/>
-        </p:spPr>
-      </p:cxnSp>
-      <p:cxnSp>
-        <p:nvCxnSpPr>
-          <p:cNvPr id="65" name="C3-E32 line 63" descr="sci-ppt:o063"/>
-          <p:cNvCxnSpPr/>
-          <p:nvPr/>
-        </p:nvCxnSpPr>
-        <p:spPr>
-          <a:xfrm>
-            <a:off x="9034272" y="1484512"/>
-            <a:ext cx="59436" cy="67754"/>
-          </a:xfrm>
-          <a:prstGeom prst="line">
-            <a:avLst/>
-          </a:prstGeom>
-          <a:ln w="25400">
-            <a:solidFill>
-              <a:srgbClr val="8EDBD4"/>
-            </a:solidFill>
-          </a:ln>
-          <a:effectLst/>
-        </p:spPr>
-      </p:cxnSp>
-      <p:cxnSp>
-        <p:nvCxnSpPr>
-          <p:cNvPr id="66" name="C3-E32 line 64" descr="sci-ppt:o064"/>
-          <p:cNvCxnSpPr/>
-          <p:nvPr/>
-        </p:nvCxnSpPr>
-        <p:spPr>
-          <a:xfrm>
-            <a:off x="9093708" y="1552266"/>
-            <a:ext cx="59436" cy="66203"/>
-          </a:xfrm>
-          <a:prstGeom prst="line">
-            <a:avLst/>
-          </a:prstGeom>
-          <a:ln w="25400">
-            <a:solidFill>
-              <a:srgbClr val="8EDBD4"/>
-            </a:solidFill>
-          </a:ln>
-          <a:effectLst/>
-        </p:spPr>
-      </p:cxnSp>
-      <p:cxnSp>
-        <p:nvCxnSpPr>
-          <p:cNvPr id="67" name="C3-E32 line 65" descr="sci-ppt:o065"/>
-          <p:cNvCxnSpPr/>
-          <p:nvPr/>
-        </p:nvCxnSpPr>
-        <p:spPr>
-          <a:xfrm>
-            <a:off x="9153144" y="1618469"/>
-            <a:ext cx="59436" cy="59724"/>
-          </a:xfrm>
-          <a:prstGeom prst="line">
-            <a:avLst/>
-          </a:prstGeom>
-          <a:ln w="25400">
-            <a:solidFill>
-              <a:srgbClr val="8EDBD4"/>
-            </a:solidFill>
-          </a:ln>
-          <a:effectLst/>
-        </p:spPr>
-      </p:cxnSp>
-      <p:cxnSp>
-        <p:nvCxnSpPr>
-          <p:cNvPr id="68" name="C3-E32 line 66" descr="sci-ppt:o066"/>
-          <p:cNvCxnSpPr/>
-          <p:nvPr/>
-        </p:nvCxnSpPr>
-        <p:spPr>
-          <a:xfrm>
-            <a:off x="9212580" y="1678193"/>
-            <a:ext cx="59436" cy="48676"/>
-          </a:xfrm>
-          <a:prstGeom prst="line">
-            <a:avLst/>
-          </a:prstGeom>
-          <a:ln w="25400">
-            <a:solidFill>
-              <a:srgbClr val="8EDBD4"/>
-            </a:solidFill>
-          </a:ln>
-          <a:effectLst/>
-        </p:spPr>
-      </p:cxnSp>
-      <p:cxnSp>
-        <p:nvCxnSpPr>
-          <p:cNvPr id="69" name="C3-E32 line 67" descr="sci-ppt:o067"/>
-          <p:cNvCxnSpPr/>
-          <p:nvPr/>
-        </p:nvCxnSpPr>
-        <p:spPr>
-          <a:xfrm>
-            <a:off x="9272016" y="1726869"/>
-            <a:ext cx="59436" cy="33774"/>
-          </a:xfrm>
-          <a:prstGeom prst="line">
-            <a:avLst/>
-          </a:prstGeom>
-          <a:ln w="25400">
-            <a:solidFill>
-              <a:srgbClr val="8EDBD4"/>
-            </a:solidFill>
-          </a:ln>
-          <a:effectLst/>
-        </p:spPr>
-      </p:cxnSp>
-      <p:cxnSp>
-        <p:nvCxnSpPr>
-          <p:cNvPr id="70" name="C3-E32 line 68" descr="sci-ppt:o068"/>
-          <p:cNvCxnSpPr/>
-          <p:nvPr/>
-        </p:nvCxnSpPr>
-        <p:spPr>
-          <a:xfrm>
-            <a:off x="9331452" y="1760643"/>
-            <a:ext cx="59436" cy="16032"/>
-          </a:xfrm>
-          <a:prstGeom prst="line">
-            <a:avLst/>
-          </a:prstGeom>
-          <a:ln w="25400">
-            <a:solidFill>
-              <a:srgbClr val="8EDBD4"/>
-            </a:solidFill>
-          </a:ln>
-          <a:effectLst/>
-        </p:spPr>
-      </p:cxnSp>
-      <p:cxnSp>
-        <p:nvCxnSpPr>
-          <p:cNvPr id="71" name="C3-E32 line 69" descr="sci-ppt:o069"/>
-          <p:cNvCxnSpPr/>
-          <p:nvPr/>
-        </p:nvCxnSpPr>
-        <p:spPr>
-          <a:xfrm flipV="1">
-            <a:off x="9390888" y="1773372"/>
-            <a:ext cx="59436" cy="3303"/>
-          </a:xfrm>
-          <a:prstGeom prst="line">
-            <a:avLst/>
-          </a:prstGeom>
-          <a:ln w="25400">
-            <a:solidFill>
-              <a:srgbClr val="8EDBD4"/>
-            </a:solidFill>
-          </a:ln>
-          <a:effectLst/>
-        </p:spPr>
-      </p:cxnSp>
-      <p:cxnSp>
-        <p:nvCxnSpPr>
-          <p:cNvPr id="72" name="C3-E32 line 70" descr="sci-ppt:o070"/>
-          <p:cNvCxnSpPr/>
-          <p:nvPr/>
-        </p:nvCxnSpPr>
-        <p:spPr>
-          <a:xfrm flipV="1">
-            <a:off x="9450324" y="1750538"/>
-            <a:ext cx="59436" cy="22834"/>
-          </a:xfrm>
-          <a:prstGeom prst="line">
-            <a:avLst/>
-          </a:prstGeom>
-          <a:ln w="25400">
-            <a:solidFill>
-              <a:srgbClr val="8EDBD4"/>
-            </a:solidFill>
-          </a:ln>
-          <a:effectLst/>
-        </p:spPr>
-      </p:cxnSp>
-      <p:cxnSp>
-        <p:nvCxnSpPr>
-          <p:cNvPr id="73" name="C3-E32 line 71" descr="sci-ppt:o071"/>
-          <p:cNvCxnSpPr/>
-          <p:nvPr/>
-        </p:nvCxnSpPr>
-        <p:spPr>
-          <a:xfrm flipV="1">
-            <a:off x="9509760" y="1709416"/>
-            <a:ext cx="59436" cy="41122"/>
-          </a:xfrm>
-          <a:prstGeom prst="line">
-            <a:avLst/>
-          </a:prstGeom>
-          <a:ln w="25400">
-            <a:solidFill>
-              <a:srgbClr val="8EDBD4"/>
-            </a:solidFill>
-          </a:ln>
-          <a:effectLst/>
-        </p:spPr>
-      </p:cxnSp>
-      <p:cxnSp>
-        <p:nvCxnSpPr>
-          <p:cNvPr id="74" name="C3-E32 line 72" descr="sci-ppt:o072"/>
-          <p:cNvCxnSpPr/>
-          <p:nvPr/>
-        </p:nvCxnSpPr>
-        <p:spPr>
-          <a:xfrm flipV="1">
-            <a:off x="9569196" y="1652633"/>
-            <a:ext cx="59436" cy="56783"/>
-          </a:xfrm>
-          <a:prstGeom prst="line">
-            <a:avLst/>
-          </a:prstGeom>
-          <a:ln w="25400">
-            <a:solidFill>
-              <a:srgbClr val="8EDBD4"/>
-            </a:solidFill>
-          </a:ln>
-          <a:effectLst/>
-        </p:spPr>
-      </p:cxnSp>
-      <p:cxnSp>
-        <p:nvCxnSpPr>
-          <p:cNvPr id="75" name="C3-E32 line 73" descr="sci-ppt:o073"/>
-          <p:cNvCxnSpPr/>
-          <p:nvPr/>
-        </p:nvCxnSpPr>
-        <p:spPr>
-          <a:xfrm flipV="1">
-            <a:off x="9628632" y="1584029"/>
-            <a:ext cx="59435" cy="68604"/>
-          </a:xfrm>
-          <a:prstGeom prst="line">
-            <a:avLst/>
-          </a:prstGeom>
-          <a:ln w="25400">
-            <a:solidFill>
-              <a:srgbClr val="8EDBD4"/>
-            </a:solidFill>
-          </a:ln>
-          <a:effectLst/>
-        </p:spPr>
-      </p:cxnSp>
-      <p:cxnSp>
-        <p:nvCxnSpPr>
-          <p:cNvPr id="76" name="C3-E32 line 74" descr="sci-ppt:o074"/>
-          <p:cNvCxnSpPr/>
-          <p:nvPr/>
-        </p:nvCxnSpPr>
-        <p:spPr>
-          <a:xfrm flipV="1">
-            <a:off x="9688067" y="1508404"/>
-            <a:ext cx="59437" cy="75625"/>
-          </a:xfrm>
-          <a:prstGeom prst="line">
-            <a:avLst/>
-          </a:prstGeom>
-          <a:ln w="25400">
-            <a:solidFill>
-              <a:srgbClr val="8EDBD4"/>
-            </a:solidFill>
-          </a:ln>
-          <a:effectLst/>
-        </p:spPr>
-      </p:cxnSp>
-      <p:cxnSp>
-        <p:nvCxnSpPr>
-          <p:cNvPr id="77" name="C3-E32 line 75" descr="sci-ppt:o075"/>
-          <p:cNvCxnSpPr/>
-          <p:nvPr/>
-        </p:nvCxnSpPr>
-        <p:spPr>
-          <a:xfrm flipV="1">
-            <a:off x="9747504" y="1431179"/>
-            <a:ext cx="59436" cy="77225"/>
-          </a:xfrm>
-          <a:prstGeom prst="line">
-            <a:avLst/>
-          </a:prstGeom>
-          <a:ln w="25400">
-            <a:solidFill>
-              <a:srgbClr val="8EDBD4"/>
-            </a:solidFill>
-          </a:ln>
-          <a:effectLst/>
-        </p:spPr>
-      </p:cxnSp>
-      <p:cxnSp>
-        <p:nvCxnSpPr>
-          <p:cNvPr id="78" name="C3-E32 line 76" descr="sci-ppt:o076"/>
-          <p:cNvCxnSpPr/>
-          <p:nvPr/>
-        </p:nvCxnSpPr>
-        <p:spPr>
-          <a:xfrm flipV="1">
-            <a:off x="9806940" y="1358008"/>
-            <a:ext cx="59436" cy="73171"/>
-          </a:xfrm>
-          <a:prstGeom prst="line">
-            <a:avLst/>
-          </a:prstGeom>
-          <a:ln w="25400">
-            <a:solidFill>
-              <a:srgbClr val="8EDBD4"/>
-            </a:solidFill>
-          </a:ln>
-          <a:effectLst/>
-        </p:spPr>
-      </p:cxnSp>
-      <p:cxnSp>
-        <p:nvCxnSpPr>
-          <p:cNvPr id="79" name="C3-E32 line 77" descr="sci-ppt:o077"/>
-          <p:cNvCxnSpPr/>
-          <p:nvPr/>
-        </p:nvCxnSpPr>
-        <p:spPr>
-          <a:xfrm flipV="1">
-            <a:off x="9866376" y="1294367"/>
-            <a:ext cx="59436" cy="63641"/>
-          </a:xfrm>
-          <a:prstGeom prst="line">
-            <a:avLst/>
-          </a:prstGeom>
-          <a:ln w="25400">
-            <a:solidFill>
-              <a:srgbClr val="8EDBD4"/>
-            </a:solidFill>
-          </a:ln>
-          <a:effectLst/>
-        </p:spPr>
-      </p:cxnSp>
-      <p:cxnSp>
-        <p:nvCxnSpPr>
-          <p:cNvPr id="80" name="C3-E32 line 78" descr="sci-ppt:o078"/>
-          <p:cNvCxnSpPr/>
-          <p:nvPr/>
-        </p:nvCxnSpPr>
-        <p:spPr>
-          <a:xfrm flipV="1">
-            <a:off x="9925812" y="1245141"/>
-            <a:ext cx="59436" cy="49226"/>
-          </a:xfrm>
-          <a:prstGeom prst="line">
-            <a:avLst/>
-          </a:prstGeom>
-          <a:ln w="25400">
-            <a:solidFill>
-              <a:srgbClr val="8EDBD4"/>
-            </a:solidFill>
-          </a:ln>
-          <a:effectLst/>
-        </p:spPr>
-      </p:cxnSp>
-      <p:cxnSp>
-        <p:nvCxnSpPr>
-          <p:cNvPr id="81" name="C3-E32 line 79" descr="sci-ppt:o079"/>
-          <p:cNvCxnSpPr/>
-          <p:nvPr/>
-        </p:nvCxnSpPr>
-        <p:spPr>
-          <a:xfrm flipV="1">
-            <a:off x="9985248" y="1214251"/>
-            <a:ext cx="59436" cy="30890"/>
-          </a:xfrm>
-          <a:prstGeom prst="line">
-            <a:avLst/>
-          </a:prstGeom>
-          <a:ln w="25400">
-            <a:solidFill>
-              <a:srgbClr val="8EDBD4"/>
-            </a:solidFill>
-          </a:ln>
-          <a:effectLst/>
-        </p:spPr>
-      </p:cxnSp>
-      <p:sp>
-        <p:nvSpPr>
-          <p:cNvPr id="82" name="C3-E32 text 80" descr="sci-ppt:o080"/>
+        <p:txBody>
+          <a:bodyPr rtlCol="0" anchor="ctr"/>
+          <a:lstStyle/>
+          <a:p>
+            <a:pPr algn="ctr"/>
+          </a:p>
+        </p:txBody>
+      </p:sp>
+      <p:sp>
+        <p:nvSpPr>
+          <p:cNvPr id="30" name="C3-E32 text 28" descr="sci-ppt:o028"/>
           <p:cNvSpPr txBox="1"/>
           <p:nvPr/>
         </p:nvSpPr>
         <p:spPr>
           <a:xfrm>
-            <a:off x="5852160" y="822960"/>
-            <a:ext cx="5303520" cy="365760"/>
+            <a:off x="475488" y="969264"/>
+            <a:ext cx="6821424" cy="254889"/>
           </a:xfrm>
           <a:prstGeom prst="rect">
             <a:avLst/>
@@ -4988,7 +4853,7 @@
           <a:effectLst/>
         </p:spPr>
         <p:txBody>
-          <a:bodyPr wrap="square" lIns="27432" rIns="27432" tIns="18288" bIns="18288" anchor="ctr">
+          <a:bodyPr wrap="none" lIns="18288" rIns="18288" tIns="18288" bIns="18288" anchor="t">
             <a:spAutoFit/>
           </a:bodyPr>
           <a:lstStyle/>
@@ -4999,27 +4864,99 @@
               </a:spcAft>
             </a:pPr>
             <a:r>
-              <a:rPr sz="1800" b="0" i="0">
+              <a:rPr sz="1350" b="1" i="0">
+                <a:solidFill>
+                  <a:srgbClr val="8EDBD4"/>
+                </a:solidFill>
+                <a:latin typeface="Arial"/>
+              </a:rPr>
+              <a:t>Bounds from finite mass</a:t>
+            </a:r>
+          </a:p>
+        </p:txBody>
+      </p:sp>
+      <p:sp>
+        <p:nvSpPr>
+          <p:cNvPr id="31" name="C3-E32 text 29" descr="sci-ppt:o029"/>
+          <p:cNvSpPr txBox="1"/>
+          <p:nvPr/>
+        </p:nvSpPr>
+        <p:spPr>
+          <a:xfrm>
+            <a:off x="502920" y="1371600"/>
+            <a:ext cx="6766560" cy="262636"/>
+          </a:xfrm>
+          <a:prstGeom prst="rect">
+            <a:avLst/>
+          </a:prstGeom>
+          <a:noFill/>
+          <a:effectLst/>
+        </p:spPr>
+        <p:txBody>
+          <a:bodyPr wrap="none" lIns="18288" rIns="18288" tIns="18288" bIns="18288" anchor="t">
+            <a:spAutoFit/>
+          </a:bodyPr>
+          <a:lstStyle/>
+          <a:p>
+            <a:pPr algn="l">
+              <a:spcAft>
+                <a:spcPts val="0"/>
+              </a:spcAft>
+            </a:pPr>
+            <a:r>
+              <a:rPr sz="1400" b="1" i="0">
                 <a:solidFill>
                   <a:srgbClr val="E7F0F3"/>
                 </a:solidFill>
                 <a:latin typeface="Arial"/>
               </a:rPr>
-              <a:t>δ₀ → δ_arr during H/U_j</a:t>
-            </a:r>
-          </a:p>
-        </p:txBody>
-      </p:sp>
-      <p:sp>
-        <p:nvSpPr>
-          <p:cNvPr id="83" name="C3-E32 text 81" descr="sci-ppt:o081"/>
+              <a:t>Uᵣₘₛ ≤ √(2Eₐᵥₐᵢₗ / mⱼ),    Pⱼ² ≤ 2 mⱼ Eⱼ</a:t>
+            </a:r>
+          </a:p>
+        </p:txBody>
+      </p:sp>
+      <p:sp>
+        <p:nvSpPr>
+          <p:cNvPr id="32" name="C3-E32 round_rect 30" descr="sci-ppt:o030"/>
+          <p:cNvSpPr/>
+          <p:nvPr/>
+        </p:nvSpPr>
+        <p:spPr>
+          <a:xfrm>
+            <a:off x="365760" y="2834640"/>
+            <a:ext cx="7040880" cy="1554480"/>
+          </a:xfrm>
+          <a:prstGeom prst="roundRect">
+            <a:avLst/>
+          </a:prstGeom>
+          <a:solidFill>
+            <a:srgbClr val="213E4B"/>
+          </a:solidFill>
+          <a:ln w="20320">
+            <a:solidFill>
+              <a:srgbClr val="F2B880"/>
+            </a:solidFill>
+          </a:ln>
+          <a:effectLst/>
+        </p:spPr>
+        <p:txBody>
+          <a:bodyPr rtlCol="0" anchor="ctr"/>
+          <a:lstStyle/>
+          <a:p>
+            <a:pPr algn="ctr"/>
+          </a:p>
+        </p:txBody>
+      </p:sp>
+      <p:sp>
+        <p:nvSpPr>
+          <p:cNvPr id="33" name="C3-E32 text 31" descr="sci-ppt:o031"/>
           <p:cNvSpPr txBox="1"/>
           <p:nvPr/>
         </p:nvSpPr>
         <p:spPr>
           <a:xfrm>
-            <a:off x="1097280" y="3383280"/>
-            <a:ext cx="10058400" cy="365760"/>
+            <a:off x="475488" y="2889504"/>
+            <a:ext cx="6821424" cy="254889"/>
           </a:xfrm>
           <a:prstGeom prst="rect">
             <a:avLst/>
@@ -5028,7 +4965,7 @@
           <a:effectLst/>
         </p:spPr>
         <p:txBody>
-          <a:bodyPr wrap="square" lIns="27432" rIns="27432" tIns="18288" bIns="18288" anchor="ctr">
+          <a:bodyPr wrap="none" lIns="18288" rIns="18288" tIns="18288" bIns="18288" anchor="t">
             <a:spAutoFit/>
           </a:bodyPr>
           <a:lstStyle/>
@@ -5039,49 +4976,27 @@
               </a:spcAft>
             </a:pPr>
             <a:r>
-              <a:rPr sz="1600" b="0" i="0">
+              <a:rPr sz="1350" b="1" i="0">
                 <a:solidFill>
-                  <a:srgbClr val="8EDBD4"/>
+                  <a:srgbClr val="F2B880"/>
                 </a:solidFill>
                 <a:latin typeface="Arial"/>
               </a:rPr>
-              <a:t>Linear growth applies while disturbances remain small relative to radius.</a:t>
-            </a:r>
-          </a:p>
-        </p:txBody>
-      </p:sp>
-      <p:cxnSp>
-        <p:nvCxnSpPr>
-          <p:cNvPr id="84" name="C3-E32 line 82" descr="sci-ppt:o082"/>
-          <p:cNvCxnSpPr/>
-          <p:nvPr/>
-        </p:nvCxnSpPr>
-        <p:spPr>
-          <a:xfrm>
-            <a:off x="274320" y="3977639"/>
-            <a:ext cx="11612880" cy="0"/>
-          </a:xfrm>
-          <a:prstGeom prst="line">
-            <a:avLst/>
-          </a:prstGeom>
-          <a:ln w="12700">
-            <a:solidFill>
-              <a:srgbClr val="405967"/>
-            </a:solidFill>
-          </a:ln>
-          <a:effectLst/>
-        </p:spPr>
-      </p:cxnSp>
-      <p:sp>
-        <p:nvSpPr>
-          <p:cNvPr id="85" name="C3-E32 text 83" descr="sci-ppt:o083"/>
+              <a:t>Growth during flight</a:t>
+            </a:r>
+          </a:p>
+        </p:txBody>
+      </p:sp>
+      <p:sp>
+        <p:nvSpPr>
+          <p:cNvPr id="34" name="C3-E32 text 32" descr="sci-ppt:o032"/>
           <p:cNvSpPr txBox="1"/>
           <p:nvPr/>
         </p:nvSpPr>
         <p:spPr>
           <a:xfrm>
-            <a:off x="320040" y="4096512"/>
-            <a:ext cx="5715000" cy="246888"/>
+            <a:off x="502920" y="3291840"/>
+            <a:ext cx="6766560" cy="262636"/>
           </a:xfrm>
           <a:prstGeom prst="rect">
             <a:avLst/>
@@ -5090,7 +5005,7 @@
           <a:effectLst/>
         </p:spPr>
         <p:txBody>
-          <a:bodyPr wrap="square" lIns="27432" rIns="27432" tIns="18288" bIns="18288" anchor="ctr">
+          <a:bodyPr wrap="none" lIns="18288" rIns="18288" tIns="18288" bIns="18288" anchor="t">
             <a:spAutoFit/>
           </a:bodyPr>
           <a:lstStyle/>
@@ -5101,27 +5016,67 @@
               </a:spcAft>
             </a:pPr>
             <a:r>
-              <a:rPr sz="1150" b="0" i="0">
+              <a:rPr sz="1400" b="1" i="0">
+                <a:solidFill>
+                  <a:srgbClr val="E7F0F3"/>
+                </a:solidFill>
+                <a:latin typeface="Arial"/>
+              </a:rPr>
+              <a:t>δₐᵣᵣ / a₀ = (δ₀/a₀) exp(gₘₐₓ H / Uⱼ)</a:t>
+            </a:r>
+          </a:p>
+        </p:txBody>
+      </p:sp>
+      <p:sp>
+        <p:nvSpPr>
+          <p:cNvPr id="35" name="C3-E32 text 33" descr="sci-ppt:o033"/>
+          <p:cNvSpPr txBox="1"/>
+          <p:nvPr/>
+        </p:nvSpPr>
+        <p:spPr>
+          <a:xfrm>
+            <a:off x="502920" y="3840480"/>
+            <a:ext cx="6766560" cy="231648"/>
+          </a:xfrm>
+          <a:prstGeom prst="rect">
+            <a:avLst/>
+          </a:prstGeom>
+          <a:noFill/>
+          <a:effectLst/>
+        </p:spPr>
+        <p:txBody>
+          <a:bodyPr wrap="none" lIns="18288" rIns="18288" tIns="18288" bIns="18288" anchor="t">
+            <a:spAutoFit/>
+          </a:bodyPr>
+          <a:lstStyle/>
+          <a:p>
+            <a:pPr algn="l">
+              <a:spcAft>
+                <a:spcPts val="0"/>
+              </a:spcAft>
+            </a:pPr>
+            <a:r>
+              <a:rPr sz="1200" b="0" i="0">
                 <a:solidFill>
                   <a:srgbClr val="B4C7D2"/>
                 </a:solidFill>
                 <a:latin typeface="Arial"/>
               </a:rPr>
-              <a:t>• m_j finite liquid mass</a:t>
-            </a:r>
-          </a:p>
-        </p:txBody>
-      </p:sp>
-      <p:sp>
-        <p:nvSpPr>
-          <p:cNvPr id="86" name="C3-E32 text 84" descr="sci-ppt:o084"/>
+              <a:t>gₘₐₓ is the fastest inviscid growth rate of a cylinder.</a:t>
+            </a:r>
+          </a:p>
+        </p:txBody>
+      </p:sp>
+      <p:sp>
+        <p:nvSpPr>
+          <p:cNvPr id="36" name="C3-E32 text 34" descr="sci-ppt:o034"/>
           <p:cNvSpPr txBox="1"/>
           <p:nvPr/>
         </p:nvSpPr>
         <p:spPr>
           <a:xfrm>
-            <a:off x="6217920" y="4096512"/>
-            <a:ext cx="5715000" cy="246888"/>
+            <a:off x="365760" y="4892040"/>
+            <a:ext cx="11430000" cy="247142"/>
           </a:xfrm>
           <a:prstGeom prst="rect">
             <a:avLst/>
@@ -5130,7 +5085,7 @@
           <a:effectLst/>
         </p:spPr>
         <p:txBody>
-          <a:bodyPr wrap="square" lIns="27432" rIns="27432" tIns="18288" bIns="18288" anchor="ctr">
+          <a:bodyPr wrap="none" lIns="18288" rIns="18288" tIns="18288" bIns="18288" anchor="t">
             <a:spAutoFit/>
           </a:bodyPr>
           <a:lstStyle/>
@@ -5141,27 +5096,27 @@
               </a:spcAft>
             </a:pPr>
             <a:r>
-              <a:rPr sz="1150" b="0" i="0">
+              <a:rPr sz="1300" b="0" i="0">
                 <a:solidFill>
-                  <a:srgbClr val="B4C7D2"/>
+                  <a:srgbClr val="F2B880"/>
                 </a:solidFill>
                 <a:latin typeface="Arial"/>
               </a:rPr>
-              <a:t>• E_avail, E_j energy budget</a:t>
-            </a:r>
-          </a:p>
-        </p:txBody>
-      </p:sp>
-      <p:sp>
-        <p:nvSpPr>
-          <p:cNvPr id="87" name="C3-E32 text 85" descr="sci-ppt:o085"/>
+              <a:t>Speed, focusing and survival must all refer to the same emitted liquid state: the same mⱼ, Eⱼ and Uⱼ.</a:t>
+            </a:r>
+          </a:p>
+        </p:txBody>
+      </p:sp>
+      <p:sp>
+        <p:nvSpPr>
+          <p:cNvPr id="37" name="C3-E32 text 35" descr="sci-ppt:o035"/>
           <p:cNvSpPr txBox="1"/>
           <p:nvPr/>
         </p:nvSpPr>
         <p:spPr>
           <a:xfrm>
-            <a:off x="320040" y="4329684"/>
-            <a:ext cx="5715000" cy="246888"/>
+            <a:off x="365760" y="5440680"/>
+            <a:ext cx="11430000" cy="239395"/>
           </a:xfrm>
           <a:prstGeom prst="rect">
             <a:avLst/>
@@ -5170,7 +5125,7 @@
           <a:effectLst/>
         </p:spPr>
         <p:txBody>
-          <a:bodyPr wrap="square" lIns="27432" rIns="27432" tIns="18288" bIns="18288" anchor="ctr">
+          <a:bodyPr wrap="none" lIns="18288" rIns="18288" tIns="18288" bIns="18288" anchor="t">
             <a:spAutoFit/>
           </a:bodyPr>
           <a:lstStyle/>
@@ -5181,27 +5136,27 @@
               </a:spcAft>
             </a:pPr>
             <a:r>
-              <a:rPr sz="1150" b="0" i="0">
+              <a:rPr sz="1250" b="0" i="0">
                 <a:solidFill>
-                  <a:srgbClr val="B4C7D2"/>
+                  <a:srgbClr val="E7F0F3"/>
                 </a:solidFill>
                 <a:latin typeface="Arial"/>
               </a:rPr>
-              <a:t>• U_rms, U_j velocities</a:t>
-            </a:r>
-          </a:p>
-        </p:txBody>
-      </p:sp>
-      <p:sp>
-        <p:nvSpPr>
-          <p:cNvPr id="88" name="C3-E32 text 86" descr="sci-ppt:o086"/>
+              <a:t>Teaching case: mⱼ = 3.927 ng, Eⱼ = 2 nJ gives Uᵣₘₛ ≤ 31.9 m/s and Pⱼ ≤ 1.253×10⁻¹⁰ N s; flight 3.13 µs → δ/a₀ grows from 1 % to 2.26 %.</a:t>
+            </a:r>
+          </a:p>
+        </p:txBody>
+      </p:sp>
+      <p:sp>
+        <p:nvSpPr>
+          <p:cNvPr id="38" name="C3-E32 text 36" descr="sci-ppt:o036"/>
           <p:cNvSpPr txBox="1"/>
           <p:nvPr/>
         </p:nvSpPr>
         <p:spPr>
           <a:xfrm>
-            <a:off x="6217920" y="4329684"/>
-            <a:ext cx="5715000" cy="246888"/>
+            <a:off x="320040" y="6510528"/>
+            <a:ext cx="11521440" cy="200660"/>
           </a:xfrm>
           <a:prstGeom prst="rect">
             <a:avLst/>
@@ -5210,247 +5165,7 @@
           <a:effectLst/>
         </p:spPr>
         <p:txBody>
-          <a:bodyPr wrap="square" lIns="27432" rIns="27432" tIns="18288" bIns="18288" anchor="ctr">
-            <a:spAutoFit/>
-          </a:bodyPr>
-          <a:lstStyle/>
-          <a:p>
-            <a:pPr algn="l">
-              <a:spcAft>
-                <a:spcPts val="0"/>
-              </a:spcAft>
-            </a:pPr>
-            <a:r>
-              <a:rPr sz="1150" b="0" i="0">
-                <a:solidFill>
-                  <a:srgbClr val="B4C7D2"/>
-                </a:solidFill>
-                <a:latin typeface="Arial"/>
-              </a:rPr>
-              <a:t>• P_j useful axial momentum</a:t>
-            </a:r>
-          </a:p>
-        </p:txBody>
-      </p:sp>
-      <p:sp>
-        <p:nvSpPr>
-          <p:cNvPr id="89" name="C3-E32 text 87" descr="sci-ppt:o087"/>
-          <p:cNvSpPr txBox="1"/>
-          <p:nvPr/>
-        </p:nvSpPr>
-        <p:spPr>
-          <a:xfrm>
-            <a:off x="320040" y="4562856"/>
-            <a:ext cx="5715000" cy="246888"/>
-          </a:xfrm>
-          <a:prstGeom prst="rect">
-            <a:avLst/>
-          </a:prstGeom>
-          <a:noFill/>
-          <a:effectLst/>
-        </p:spPr>
-        <p:txBody>
-          <a:bodyPr wrap="square" lIns="27432" rIns="27432" tIns="18288" bIns="18288" anchor="ctr">
-            <a:spAutoFit/>
-          </a:bodyPr>
-          <a:lstStyle/>
-          <a:p>
-            <a:pPr algn="l">
-              <a:spcAft>
-                <a:spcPts val="0"/>
-              </a:spcAft>
-            </a:pPr>
-            <a:r>
-              <a:rPr sz="1150" b="0" i="0">
-                <a:solidFill>
-                  <a:srgbClr val="B4C7D2"/>
-                </a:solidFill>
-                <a:latin typeface="Arial"/>
-              </a:rPr>
-              <a:t>• a₀, δ₀ → δ_arr</a:t>
-            </a:r>
-          </a:p>
-        </p:txBody>
-      </p:sp>
-      <p:sp>
-        <p:nvSpPr>
-          <p:cNvPr id="90" name="C3-E32 text 88" descr="sci-ppt:o088"/>
-          <p:cNvSpPr txBox="1"/>
-          <p:nvPr/>
-        </p:nvSpPr>
-        <p:spPr>
-          <a:xfrm>
-            <a:off x="6217920" y="4562856"/>
-            <a:ext cx="5715000" cy="246888"/>
-          </a:xfrm>
-          <a:prstGeom prst="rect">
-            <a:avLst/>
-          </a:prstGeom>
-          <a:noFill/>
-          <a:effectLst/>
-        </p:spPr>
-        <p:txBody>
-          <a:bodyPr wrap="square" lIns="27432" rIns="27432" tIns="18288" bIns="18288" anchor="ctr">
-            <a:spAutoFit/>
-          </a:bodyPr>
-          <a:lstStyle/>
-          <a:p>
-            <a:pPr algn="l">
-              <a:spcAft>
-                <a:spcPts val="0"/>
-              </a:spcAft>
-            </a:pPr>
-            <a:r>
-              <a:rPr sz="1150" b="0" i="0">
-                <a:solidFill>
-                  <a:srgbClr val="B4C7D2"/>
-                </a:solidFill>
-                <a:latin typeface="Arial"/>
-              </a:rPr>
-              <a:t>• H flight gap; g_max growth</a:t>
-            </a:r>
-          </a:p>
-        </p:txBody>
-      </p:sp>
-      <p:sp>
-        <p:nvSpPr>
-          <p:cNvPr id="91" name="C3-E32 text 89" descr="sci-ppt:o089"/>
-          <p:cNvSpPr txBox="1"/>
-          <p:nvPr/>
-        </p:nvSpPr>
-        <p:spPr>
-          <a:xfrm>
-            <a:off x="320040" y="4796028"/>
-            <a:ext cx="5715000" cy="246888"/>
-          </a:xfrm>
-          <a:prstGeom prst="rect">
-            <a:avLst/>
-          </a:prstGeom>
-          <a:noFill/>
-          <a:effectLst/>
-        </p:spPr>
-        <p:txBody>
-          <a:bodyPr wrap="square" lIns="27432" rIns="27432" tIns="18288" bIns="18288" anchor="ctr">
-            <a:spAutoFit/>
-          </a:bodyPr>
-          <a:lstStyle/>
-          <a:p>
-            <a:pPr algn="l">
-              <a:spcAft>
-                <a:spcPts val="0"/>
-              </a:spcAft>
-            </a:pPr>
-            <a:r>
-              <a:rPr sz="1150" b="0" i="0">
-                <a:solidFill>
-                  <a:srgbClr val="B4C7D2"/>
-                </a:solidFill>
-                <a:latin typeface="Arial"/>
-              </a:rPr>
-              <a:t>• exp(g_max H/U_j) flight amplification</a:t>
-            </a:r>
-          </a:p>
-        </p:txBody>
-      </p:sp>
-      <p:sp>
-        <p:nvSpPr>
-          <p:cNvPr id="92" name="C3-E32 text 90" descr="sci-ppt:o090"/>
-          <p:cNvSpPr txBox="1"/>
-          <p:nvPr/>
-        </p:nvSpPr>
-        <p:spPr>
-          <a:xfrm>
-            <a:off x="320040" y="5596128"/>
-            <a:ext cx="11430000" cy="292608"/>
-          </a:xfrm>
-          <a:prstGeom prst="rect">
-            <a:avLst/>
-          </a:prstGeom>
-          <a:noFill/>
-          <a:effectLst/>
-        </p:spPr>
-        <p:txBody>
-          <a:bodyPr wrap="square" lIns="27432" rIns="27432" tIns="18288" bIns="18288" anchor="ctr">
-            <a:spAutoFit/>
-          </a:bodyPr>
-          <a:lstStyle/>
-          <a:p>
-            <a:pPr algn="l">
-              <a:spcAft>
-                <a:spcPts val="0"/>
-              </a:spcAft>
-            </a:pPr>
-            <a:r>
-              <a:rPr sz="1150" b="0" i="0">
-                <a:solidFill>
-                  <a:srgbClr val="8EDBD4"/>
-                </a:solidFill>
-                <a:latin typeface="Arial"/>
-              </a:rPr>
-              <a:t>Fastest tip speed differs from a finite-mass velocity</a:t>
-            </a:r>
-          </a:p>
-        </p:txBody>
-      </p:sp>
-      <p:sp>
-        <p:nvSpPr>
-          <p:cNvPr id="93" name="C3-E32 text 91" descr="sci-ppt:o091"/>
-          <p:cNvSpPr txBox="1"/>
-          <p:nvPr/>
-        </p:nvSpPr>
-        <p:spPr>
-          <a:xfrm>
-            <a:off x="320040" y="5870448"/>
-            <a:ext cx="11430000" cy="292608"/>
-          </a:xfrm>
-          <a:prstGeom prst="rect">
-            <a:avLst/>
-          </a:prstGeom>
-          <a:noFill/>
-          <a:effectLst/>
-        </p:spPr>
-        <p:txBody>
-          <a:bodyPr wrap="square" lIns="27432" rIns="27432" tIns="18288" bIns="18288" anchor="ctr">
-            <a:spAutoFit/>
-          </a:bodyPr>
-          <a:lstStyle/>
-          <a:p>
-            <a:pPr algn="l">
-              <a:spcAft>
-                <a:spcPts val="0"/>
-              </a:spcAft>
-            </a:pPr>
-            <a:r>
-              <a:rPr sz="1150" b="0" i="0">
-                <a:solidFill>
-                  <a:srgbClr val="8EDBD4"/>
-                </a:solidFill>
-                <a:latin typeface="Arial"/>
-              </a:rPr>
-              <a:t>Coherent arrival depends on initial disturbance and finite geometry</a:t>
-            </a:r>
-          </a:p>
-        </p:txBody>
-      </p:sp>
-      <p:sp>
-        <p:nvSpPr>
-          <p:cNvPr id="94" name="C3-E32 text 92" descr="sci-ppt:o092"/>
-          <p:cNvSpPr txBox="1"/>
-          <p:nvPr/>
-        </p:nvSpPr>
-        <p:spPr>
-          <a:xfrm>
-            <a:off x="320040" y="6473952"/>
-            <a:ext cx="11430000" cy="256032"/>
-          </a:xfrm>
-          <a:prstGeom prst="rect">
-            <a:avLst/>
-          </a:prstGeom>
-          <a:noFill/>
-          <a:effectLst/>
-        </p:spPr>
-        <p:txBody>
-          <a:bodyPr wrap="square" lIns="27432" rIns="27432" tIns="18288" bIns="18288" anchor="ctr">
+          <a:bodyPr wrap="none" lIns="18288" rIns="18288" tIns="18288" bIns="18288" anchor="t">
             <a:spAutoFit/>
           </a:bodyPr>
           <a:lstStyle/>
@@ -5467,7 +5182,7 @@
                 </a:solidFill>
                 <a:latin typeface="Arial"/>
               </a:rPr>
-              <a:t>Model schematic; geometry is not to scale.</a:t>
+              <a:t>Reference formulas of the Defence 2 answer: Eqs. C3-E18, E21, E22.</a:t>
             </a:r>
           </a:p>
         </p:txBody>
